--- a/source/Alphafold.pptx
+++ b/source/Alphafold.pptx
@@ -259,7 +259,7 @@
           <a:p>
             <a:fld id="{250E99D2-494C-4EDB-8DE3-59EFC1FDB0F4}" type="datetimeFigureOut">
               <a:rPr lang="zh-CN" altLang="en-US" smtClean="0"/>
-              <a:t>2025/8/30</a:t>
+              <a:t>2025/12/16</a:t>
             </a:fld>
             <a:endParaRPr lang="zh-CN" altLang="en-US"/>
           </a:p>
@@ -457,7 +457,7 @@
           <a:p>
             <a:fld id="{250E99D2-494C-4EDB-8DE3-59EFC1FDB0F4}" type="datetimeFigureOut">
               <a:rPr lang="zh-CN" altLang="en-US" smtClean="0"/>
-              <a:t>2025/8/30</a:t>
+              <a:t>2025/12/16</a:t>
             </a:fld>
             <a:endParaRPr lang="zh-CN" altLang="en-US"/>
           </a:p>
@@ -665,7 +665,7 @@
           <a:p>
             <a:fld id="{250E99D2-494C-4EDB-8DE3-59EFC1FDB0F4}" type="datetimeFigureOut">
               <a:rPr lang="zh-CN" altLang="en-US" smtClean="0"/>
-              <a:t>2025/8/30</a:t>
+              <a:t>2025/12/16</a:t>
             </a:fld>
             <a:endParaRPr lang="zh-CN" altLang="en-US"/>
           </a:p>
@@ -863,7 +863,7 @@
           <a:p>
             <a:fld id="{250E99D2-494C-4EDB-8DE3-59EFC1FDB0F4}" type="datetimeFigureOut">
               <a:rPr lang="zh-CN" altLang="en-US" smtClean="0"/>
-              <a:t>2025/8/30</a:t>
+              <a:t>2025/12/16</a:t>
             </a:fld>
             <a:endParaRPr lang="zh-CN" altLang="en-US"/>
           </a:p>
@@ -1138,7 +1138,7 @@
           <a:p>
             <a:fld id="{250E99D2-494C-4EDB-8DE3-59EFC1FDB0F4}" type="datetimeFigureOut">
               <a:rPr lang="zh-CN" altLang="en-US" smtClean="0"/>
-              <a:t>2025/8/30</a:t>
+              <a:t>2025/12/16</a:t>
             </a:fld>
             <a:endParaRPr lang="zh-CN" altLang="en-US"/>
           </a:p>
@@ -1403,7 +1403,7 @@
           <a:p>
             <a:fld id="{250E99D2-494C-4EDB-8DE3-59EFC1FDB0F4}" type="datetimeFigureOut">
               <a:rPr lang="zh-CN" altLang="en-US" smtClean="0"/>
-              <a:t>2025/8/30</a:t>
+              <a:t>2025/12/16</a:t>
             </a:fld>
             <a:endParaRPr lang="zh-CN" altLang="en-US"/>
           </a:p>
@@ -1815,7 +1815,7 @@
           <a:p>
             <a:fld id="{250E99D2-494C-4EDB-8DE3-59EFC1FDB0F4}" type="datetimeFigureOut">
               <a:rPr lang="zh-CN" altLang="en-US" smtClean="0"/>
-              <a:t>2025/8/30</a:t>
+              <a:t>2025/12/16</a:t>
             </a:fld>
             <a:endParaRPr lang="zh-CN" altLang="en-US"/>
           </a:p>
@@ -1956,7 +1956,7 @@
           <a:p>
             <a:fld id="{250E99D2-494C-4EDB-8DE3-59EFC1FDB0F4}" type="datetimeFigureOut">
               <a:rPr lang="zh-CN" altLang="en-US" smtClean="0"/>
-              <a:t>2025/8/30</a:t>
+              <a:t>2025/12/16</a:t>
             </a:fld>
             <a:endParaRPr lang="zh-CN" altLang="en-US"/>
           </a:p>
@@ -2069,7 +2069,7 @@
           <a:p>
             <a:fld id="{250E99D2-494C-4EDB-8DE3-59EFC1FDB0F4}" type="datetimeFigureOut">
               <a:rPr lang="zh-CN" altLang="en-US" smtClean="0"/>
-              <a:t>2025/8/30</a:t>
+              <a:t>2025/12/16</a:t>
             </a:fld>
             <a:endParaRPr lang="zh-CN" altLang="en-US"/>
           </a:p>
@@ -2380,7 +2380,7 @@
           <a:p>
             <a:fld id="{250E99D2-494C-4EDB-8DE3-59EFC1FDB0F4}" type="datetimeFigureOut">
               <a:rPr lang="zh-CN" altLang="en-US" smtClean="0"/>
-              <a:t>2025/8/30</a:t>
+              <a:t>2025/12/16</a:t>
             </a:fld>
             <a:endParaRPr lang="zh-CN" altLang="en-US"/>
           </a:p>
@@ -2668,7 +2668,7 @@
           <a:p>
             <a:fld id="{250E99D2-494C-4EDB-8DE3-59EFC1FDB0F4}" type="datetimeFigureOut">
               <a:rPr lang="zh-CN" altLang="en-US" smtClean="0"/>
-              <a:t>2025/8/30</a:t>
+              <a:t>2025/12/16</a:t>
             </a:fld>
             <a:endParaRPr lang="zh-CN" altLang="en-US"/>
           </a:p>
@@ -2909,7 +2909,7 @@
           <a:p>
             <a:fld id="{250E99D2-494C-4EDB-8DE3-59EFC1FDB0F4}" type="datetimeFigureOut">
               <a:rPr lang="zh-CN" altLang="en-US" smtClean="0"/>
-              <a:t>2025/8/30</a:t>
+              <a:t>2025/12/16</a:t>
             </a:fld>
             <a:endParaRPr lang="zh-CN" altLang="en-US"/>
           </a:p>
@@ -3326,6 +3326,480 @@
           <a:chExt cx="0" cy="0"/>
         </a:xfrm>
       </p:grpSpPr>
+      <p:grpSp>
+        <p:nvGrpSpPr>
+          <p:cNvPr id="45" name="组合 44">
+            <a:extLst>
+              <a:ext uri="{FF2B5EF4-FFF2-40B4-BE49-F238E27FC236}">
+                <a16:creationId xmlns:a16="http://schemas.microsoft.com/office/drawing/2014/main" id="{B6799C06-7D03-A6C7-FB80-0D02DE094128}"/>
+              </a:ext>
+            </a:extLst>
+          </p:cNvPr>
+          <p:cNvGrpSpPr/>
+          <p:nvPr/>
+        </p:nvGrpSpPr>
+        <p:grpSpPr>
+          <a:xfrm rot="16200000" flipV="1">
+            <a:off x="4965594" y="1426373"/>
+            <a:ext cx="1912407" cy="3955205"/>
+            <a:chOff x="6730819" y="1098597"/>
+            <a:chExt cx="2408844" cy="1595064"/>
+          </a:xfrm>
+        </p:grpSpPr>
+        <p:grpSp>
+          <p:nvGrpSpPr>
+            <p:cNvPr id="46" name="组合 45">
+              <a:extLst>
+                <a:ext uri="{FF2B5EF4-FFF2-40B4-BE49-F238E27FC236}">
+                  <a16:creationId xmlns:a16="http://schemas.microsoft.com/office/drawing/2014/main" id="{928979EA-1776-4243-B734-10941AAED1B3}"/>
+                </a:ext>
+              </a:extLst>
+            </p:cNvPr>
+            <p:cNvGrpSpPr/>
+            <p:nvPr/>
+          </p:nvGrpSpPr>
+          <p:grpSpPr>
+            <a:xfrm>
+              <a:off x="6730819" y="1098597"/>
+              <a:ext cx="2408844" cy="1595064"/>
+              <a:chOff x="6045436" y="5650860"/>
+              <a:chExt cx="1756567" cy="967144"/>
+            </a:xfrm>
+          </p:grpSpPr>
+          <p:sp>
+            <p:nvSpPr>
+              <p:cNvPr id="48" name="矩形: 圆角 47">
+                <a:extLst>
+                  <a:ext uri="{FF2B5EF4-FFF2-40B4-BE49-F238E27FC236}">
+                    <a16:creationId xmlns:a16="http://schemas.microsoft.com/office/drawing/2014/main" id="{0D099653-408C-F796-95E8-7C5D0BA545B0}"/>
+                  </a:ext>
+                </a:extLst>
+              </p:cNvPr>
+              <p:cNvSpPr/>
+              <p:nvPr/>
+            </p:nvSpPr>
+            <p:spPr>
+              <a:xfrm>
+                <a:off x="6092306" y="5818398"/>
+                <a:ext cx="1631447" cy="647207"/>
+              </a:xfrm>
+              <a:prstGeom prst="roundRect">
+                <a:avLst/>
+              </a:prstGeom>
+              <a:noFill/>
+            </p:spPr>
+            <p:style>
+              <a:lnRef idx="2">
+                <a:schemeClr val="accent1">
+                  <a:shade val="15000"/>
+                </a:schemeClr>
+              </a:lnRef>
+              <a:fillRef idx="1">
+                <a:schemeClr val="accent1"/>
+              </a:fillRef>
+              <a:effectRef idx="0">
+                <a:schemeClr val="accent1"/>
+              </a:effectRef>
+              <a:fontRef idx="minor">
+                <a:schemeClr val="lt1"/>
+              </a:fontRef>
+            </p:style>
+            <p:txBody>
+              <a:bodyPr rtlCol="0" anchor="ctr"/>
+              <a:lstStyle/>
+              <a:p>
+                <a:pPr algn="ctr"/>
+                <a:endParaRPr lang="zh-CN" altLang="en-US"/>
+              </a:p>
+            </p:txBody>
+          </p:sp>
+          <p:sp>
+            <p:nvSpPr>
+              <p:cNvPr id="50" name="矩形 49">
+                <a:extLst>
+                  <a:ext uri="{FF2B5EF4-FFF2-40B4-BE49-F238E27FC236}">
+                    <a16:creationId xmlns:a16="http://schemas.microsoft.com/office/drawing/2014/main" id="{1015B087-0D23-EE0D-AE77-4A22E92866D2}"/>
+                  </a:ext>
+                </a:extLst>
+              </p:cNvPr>
+              <p:cNvSpPr/>
+              <p:nvPr/>
+            </p:nvSpPr>
+            <p:spPr>
+              <a:xfrm>
+                <a:off x="6045436" y="5650860"/>
+                <a:ext cx="1756567" cy="407040"/>
+              </a:xfrm>
+              <a:prstGeom prst="rect">
+                <a:avLst/>
+              </a:prstGeom>
+              <a:solidFill>
+                <a:schemeClr val="bg1"/>
+              </a:solidFill>
+              <a:ln>
+                <a:noFill/>
+              </a:ln>
+            </p:spPr>
+            <p:style>
+              <a:lnRef idx="2">
+                <a:schemeClr val="accent1">
+                  <a:shade val="15000"/>
+                </a:schemeClr>
+              </a:lnRef>
+              <a:fillRef idx="1">
+                <a:schemeClr val="accent1"/>
+              </a:fillRef>
+              <a:effectRef idx="0">
+                <a:schemeClr val="accent1"/>
+              </a:effectRef>
+              <a:fontRef idx="minor">
+                <a:schemeClr val="lt1"/>
+              </a:fontRef>
+            </p:style>
+            <p:txBody>
+              <a:bodyPr rtlCol="0" anchor="ctr"/>
+              <a:lstStyle/>
+              <a:p>
+                <a:pPr algn="ctr"/>
+                <a:endParaRPr lang="zh-CN" altLang="en-US"/>
+              </a:p>
+            </p:txBody>
+          </p:sp>
+          <p:sp>
+            <p:nvSpPr>
+              <p:cNvPr id="52" name="矩形 51">
+                <a:extLst>
+                  <a:ext uri="{FF2B5EF4-FFF2-40B4-BE49-F238E27FC236}">
+                    <a16:creationId xmlns:a16="http://schemas.microsoft.com/office/drawing/2014/main" id="{7CD5BD78-3A8E-46A8-4D4F-A8D61B5A1263}"/>
+                  </a:ext>
+                </a:extLst>
+              </p:cNvPr>
+              <p:cNvSpPr/>
+              <p:nvPr/>
+            </p:nvSpPr>
+            <p:spPr>
+              <a:xfrm>
+                <a:off x="6045436" y="5970797"/>
+                <a:ext cx="934265" cy="647207"/>
+              </a:xfrm>
+              <a:prstGeom prst="rect">
+                <a:avLst/>
+              </a:prstGeom>
+              <a:solidFill>
+                <a:schemeClr val="bg1"/>
+              </a:solidFill>
+              <a:ln>
+                <a:noFill/>
+              </a:ln>
+            </p:spPr>
+            <p:style>
+              <a:lnRef idx="2">
+                <a:schemeClr val="accent1">
+                  <a:shade val="15000"/>
+                </a:schemeClr>
+              </a:lnRef>
+              <a:fillRef idx="1">
+                <a:schemeClr val="accent1"/>
+              </a:fillRef>
+              <a:effectRef idx="0">
+                <a:schemeClr val="accent1"/>
+              </a:effectRef>
+              <a:fontRef idx="minor">
+                <a:schemeClr val="lt1"/>
+              </a:fontRef>
+            </p:style>
+            <p:txBody>
+              <a:bodyPr rtlCol="0" anchor="ctr"/>
+              <a:lstStyle/>
+              <a:p>
+                <a:pPr algn="ctr"/>
+                <a:endParaRPr lang="zh-CN" altLang="en-US"/>
+              </a:p>
+            </p:txBody>
+          </p:sp>
+        </p:grpSp>
+        <p:cxnSp>
+          <p:nvCxnSpPr>
+            <p:cNvPr id="47" name="直接箭头连接符 46">
+              <a:extLst>
+                <a:ext uri="{FF2B5EF4-FFF2-40B4-BE49-F238E27FC236}">
+                  <a16:creationId xmlns:a16="http://schemas.microsoft.com/office/drawing/2014/main" id="{C2B4C48A-36C6-994C-013B-D464E1CA81C0}"/>
+                </a:ext>
+              </a:extLst>
+            </p:cNvPr>
+            <p:cNvCxnSpPr>
+              <a:cxnSpLocks/>
+            </p:cNvCxnSpPr>
+            <p:nvPr/>
+          </p:nvCxnSpPr>
+          <p:spPr>
+            <a:xfrm rot="16200000" flipV="1">
+              <a:off x="8288534" y="2155965"/>
+              <a:ext cx="619" cy="572085"/>
+            </a:xfrm>
+            <a:prstGeom prst="straightConnector1">
+              <a:avLst/>
+            </a:prstGeom>
+            <a:ln w="12700">
+              <a:solidFill>
+                <a:schemeClr val="tx1"/>
+              </a:solidFill>
+              <a:tailEnd type="triangle"/>
+            </a:ln>
+          </p:spPr>
+          <p:style>
+            <a:lnRef idx="1">
+              <a:schemeClr val="accent1"/>
+            </a:lnRef>
+            <a:fillRef idx="0">
+              <a:schemeClr val="accent1"/>
+            </a:fillRef>
+            <a:effectRef idx="0">
+              <a:schemeClr val="accent1"/>
+            </a:effectRef>
+            <a:fontRef idx="minor">
+              <a:schemeClr val="tx1"/>
+            </a:fontRef>
+          </p:style>
+        </p:cxnSp>
+      </p:grpSp>
+      <p:grpSp>
+        <p:nvGrpSpPr>
+          <p:cNvPr id="44" name="组合 43">
+            <a:extLst>
+              <a:ext uri="{FF2B5EF4-FFF2-40B4-BE49-F238E27FC236}">
+                <a16:creationId xmlns:a16="http://schemas.microsoft.com/office/drawing/2014/main" id="{E345E4A2-3722-5106-6BA4-703AAA24C4CE}"/>
+              </a:ext>
+            </a:extLst>
+          </p:cNvPr>
+          <p:cNvGrpSpPr/>
+          <p:nvPr/>
+        </p:nvGrpSpPr>
+        <p:grpSpPr>
+          <a:xfrm>
+            <a:off x="6730819" y="1008099"/>
+            <a:ext cx="2408844" cy="1802317"/>
+            <a:chOff x="6730819" y="1098597"/>
+            <a:chExt cx="2408844" cy="1595064"/>
+          </a:xfrm>
+        </p:grpSpPr>
+        <p:grpSp>
+          <p:nvGrpSpPr>
+            <p:cNvPr id="36" name="组合 35">
+              <a:extLst>
+                <a:ext uri="{FF2B5EF4-FFF2-40B4-BE49-F238E27FC236}">
+                  <a16:creationId xmlns:a16="http://schemas.microsoft.com/office/drawing/2014/main" id="{EC856FDD-E2CC-CF5C-7557-266532A13EFD}"/>
+                </a:ext>
+              </a:extLst>
+            </p:cNvPr>
+            <p:cNvGrpSpPr/>
+            <p:nvPr/>
+          </p:nvGrpSpPr>
+          <p:grpSpPr>
+            <a:xfrm>
+              <a:off x="6730819" y="1098597"/>
+              <a:ext cx="2408844" cy="1595064"/>
+              <a:chOff x="6045436" y="5650860"/>
+              <a:chExt cx="1756567" cy="967144"/>
+            </a:xfrm>
+          </p:grpSpPr>
+          <p:sp>
+            <p:nvSpPr>
+              <p:cNvPr id="33" name="矩形: 圆角 32">
+                <a:extLst>
+                  <a:ext uri="{FF2B5EF4-FFF2-40B4-BE49-F238E27FC236}">
+                    <a16:creationId xmlns:a16="http://schemas.microsoft.com/office/drawing/2014/main" id="{0F2363AA-EE5A-BADC-AB9D-E7CFB763AC28}"/>
+                  </a:ext>
+                </a:extLst>
+              </p:cNvPr>
+              <p:cNvSpPr/>
+              <p:nvPr/>
+            </p:nvSpPr>
+            <p:spPr>
+              <a:xfrm>
+                <a:off x="6092306" y="5818398"/>
+                <a:ext cx="1631447" cy="647207"/>
+              </a:xfrm>
+              <a:prstGeom prst="roundRect">
+                <a:avLst/>
+              </a:prstGeom>
+              <a:noFill/>
+            </p:spPr>
+            <p:style>
+              <a:lnRef idx="2">
+                <a:schemeClr val="accent1">
+                  <a:shade val="15000"/>
+                </a:schemeClr>
+              </a:lnRef>
+              <a:fillRef idx="1">
+                <a:schemeClr val="accent1"/>
+              </a:fillRef>
+              <a:effectRef idx="0">
+                <a:schemeClr val="accent1"/>
+              </a:effectRef>
+              <a:fontRef idx="minor">
+                <a:schemeClr val="lt1"/>
+              </a:fontRef>
+            </p:style>
+            <p:txBody>
+              <a:bodyPr rtlCol="0" anchor="ctr"/>
+              <a:lstStyle/>
+              <a:p>
+                <a:pPr algn="ctr"/>
+                <a:endParaRPr lang="zh-CN" altLang="en-US"/>
+              </a:p>
+            </p:txBody>
+          </p:sp>
+          <p:sp>
+            <p:nvSpPr>
+              <p:cNvPr id="34" name="矩形 33">
+                <a:extLst>
+                  <a:ext uri="{FF2B5EF4-FFF2-40B4-BE49-F238E27FC236}">
+                    <a16:creationId xmlns:a16="http://schemas.microsoft.com/office/drawing/2014/main" id="{D2EED999-C16C-D945-87B5-398C53366A58}"/>
+                  </a:ext>
+                </a:extLst>
+              </p:cNvPr>
+              <p:cNvSpPr/>
+              <p:nvPr/>
+            </p:nvSpPr>
+            <p:spPr>
+              <a:xfrm>
+                <a:off x="6045436" y="5650860"/>
+                <a:ext cx="1756567" cy="407040"/>
+              </a:xfrm>
+              <a:prstGeom prst="rect">
+                <a:avLst/>
+              </a:prstGeom>
+              <a:solidFill>
+                <a:schemeClr val="bg1"/>
+              </a:solidFill>
+              <a:ln>
+                <a:noFill/>
+              </a:ln>
+            </p:spPr>
+            <p:style>
+              <a:lnRef idx="2">
+                <a:schemeClr val="accent1">
+                  <a:shade val="15000"/>
+                </a:schemeClr>
+              </a:lnRef>
+              <a:fillRef idx="1">
+                <a:schemeClr val="accent1"/>
+              </a:fillRef>
+              <a:effectRef idx="0">
+                <a:schemeClr val="accent1"/>
+              </a:effectRef>
+              <a:fontRef idx="minor">
+                <a:schemeClr val="lt1"/>
+              </a:fontRef>
+            </p:style>
+            <p:txBody>
+              <a:bodyPr rtlCol="0" anchor="ctr"/>
+              <a:lstStyle/>
+              <a:p>
+                <a:pPr algn="ctr"/>
+                <a:endParaRPr lang="zh-CN" altLang="en-US"/>
+              </a:p>
+            </p:txBody>
+          </p:sp>
+          <p:sp>
+            <p:nvSpPr>
+              <p:cNvPr id="35" name="矩形 34">
+                <a:extLst>
+                  <a:ext uri="{FF2B5EF4-FFF2-40B4-BE49-F238E27FC236}">
+                    <a16:creationId xmlns:a16="http://schemas.microsoft.com/office/drawing/2014/main" id="{5C3161F7-FD59-6EDD-C868-F72B1AD2565B}"/>
+                  </a:ext>
+                </a:extLst>
+              </p:cNvPr>
+              <p:cNvSpPr/>
+              <p:nvPr/>
+            </p:nvSpPr>
+            <p:spPr>
+              <a:xfrm>
+                <a:off x="6045436" y="5970797"/>
+                <a:ext cx="934265" cy="647207"/>
+              </a:xfrm>
+              <a:prstGeom prst="rect">
+                <a:avLst/>
+              </a:prstGeom>
+              <a:solidFill>
+                <a:schemeClr val="bg1"/>
+              </a:solidFill>
+              <a:ln>
+                <a:noFill/>
+              </a:ln>
+            </p:spPr>
+            <p:style>
+              <a:lnRef idx="2">
+                <a:schemeClr val="accent1">
+                  <a:shade val="15000"/>
+                </a:schemeClr>
+              </a:lnRef>
+              <a:fillRef idx="1">
+                <a:schemeClr val="accent1"/>
+              </a:fillRef>
+              <a:effectRef idx="0">
+                <a:schemeClr val="accent1"/>
+              </a:effectRef>
+              <a:fontRef idx="minor">
+                <a:schemeClr val="lt1"/>
+              </a:fontRef>
+            </p:style>
+            <p:txBody>
+              <a:bodyPr rtlCol="0" anchor="ctr"/>
+              <a:lstStyle/>
+              <a:p>
+                <a:pPr algn="ctr"/>
+                <a:endParaRPr lang="zh-CN" altLang="en-US"/>
+              </a:p>
+            </p:txBody>
+          </p:sp>
+        </p:grpSp>
+        <p:cxnSp>
+          <p:nvCxnSpPr>
+            <p:cNvPr id="37" name="直接箭头连接符 36">
+              <a:extLst>
+                <a:ext uri="{FF2B5EF4-FFF2-40B4-BE49-F238E27FC236}">
+                  <a16:creationId xmlns:a16="http://schemas.microsoft.com/office/drawing/2014/main" id="{D8940243-7DE2-9FA8-1110-A8E33CB7C361}"/>
+                </a:ext>
+              </a:extLst>
+            </p:cNvPr>
+            <p:cNvCxnSpPr>
+              <a:cxnSpLocks/>
+            </p:cNvCxnSpPr>
+            <p:nvPr/>
+          </p:nvCxnSpPr>
+          <p:spPr>
+            <a:xfrm flipH="1">
+              <a:off x="8002800" y="2441698"/>
+              <a:ext cx="781631" cy="0"/>
+            </a:xfrm>
+            <a:prstGeom prst="straightConnector1">
+              <a:avLst/>
+            </a:prstGeom>
+            <a:ln w="12700">
+              <a:solidFill>
+                <a:schemeClr val="tx1"/>
+              </a:solidFill>
+              <a:tailEnd type="triangle"/>
+            </a:ln>
+          </p:spPr>
+          <p:style>
+            <a:lnRef idx="1">
+              <a:schemeClr val="accent1"/>
+            </a:lnRef>
+            <a:fillRef idx="0">
+              <a:schemeClr val="accent1"/>
+            </a:fillRef>
+            <a:effectRef idx="0">
+              <a:schemeClr val="accent1"/>
+            </a:effectRef>
+            <a:fontRef idx="minor">
+              <a:schemeClr val="tx1"/>
+            </a:fontRef>
+          </p:style>
+        </p:cxnSp>
+      </p:grpSp>
       <p:sp>
         <p:nvSpPr>
           <p:cNvPr id="4" name="矩形: 圆角 3">
@@ -3340,7 +3814,7 @@
         </p:nvSpPr>
         <p:spPr>
           <a:xfrm>
-            <a:off x="641145" y="1195579"/>
+            <a:off x="641145" y="1004581"/>
             <a:ext cx="1760832" cy="544414"/>
           </a:xfrm>
           <a:prstGeom prst="roundRect">
@@ -3378,6 +3852,8 @@
                 <a:solidFill>
                   <a:schemeClr val="tx1"/>
                 </a:solidFill>
+                <a:latin typeface="Times New Roman" panose="02020603050405020304" pitchFamily="18" charset="0"/>
+                <a:cs typeface="Times New Roman" panose="02020603050405020304" pitchFamily="18" charset="0"/>
               </a:rPr>
               <a:t>Embedding</a:t>
             </a:r>
@@ -3385,6 +3861,8 @@
               <a:solidFill>
                 <a:schemeClr val="tx1"/>
               </a:solidFill>
+              <a:latin typeface="Times New Roman" panose="02020603050405020304" pitchFamily="18" charset="0"/>
+              <a:cs typeface="Times New Roman" panose="02020603050405020304" pitchFamily="18" charset="0"/>
             </a:endParaRPr>
           </a:p>
         </p:txBody>
@@ -3403,7 +3881,7 @@
         </p:nvSpPr>
         <p:spPr>
           <a:xfrm>
-            <a:off x="641144" y="3740417"/>
+            <a:off x="641144" y="3511817"/>
             <a:ext cx="1760834" cy="544414"/>
           </a:xfrm>
           <a:prstGeom prst="roundRect">
@@ -3441,6 +3919,8 @@
                 <a:solidFill>
                   <a:schemeClr val="tx1"/>
                 </a:solidFill>
+                <a:latin typeface="Times New Roman" panose="02020603050405020304" pitchFamily="18" charset="0"/>
+                <a:cs typeface="Times New Roman" panose="02020603050405020304" pitchFamily="18" charset="0"/>
               </a:rPr>
               <a:t>8×Structure</a:t>
             </a:r>
@@ -3448,6 +3928,8 @@
               <a:solidFill>
                 <a:schemeClr val="tx1"/>
               </a:solidFill>
+              <a:latin typeface="Times New Roman" panose="02020603050405020304" pitchFamily="18" charset="0"/>
+              <a:cs typeface="Times New Roman" panose="02020603050405020304" pitchFamily="18" charset="0"/>
             </a:endParaRPr>
           </a:p>
         </p:txBody>
@@ -3469,13 +3951,13 @@
         </p:nvCxnSpPr>
         <p:spPr>
           <a:xfrm>
-            <a:off x="1521561" y="1739993"/>
-            <a:ext cx="1" cy="313429"/>
+            <a:off x="1521561" y="1548995"/>
+            <a:ext cx="1" cy="277877"/>
           </a:xfrm>
           <a:prstGeom prst="straightConnector1">
             <a:avLst/>
           </a:prstGeom>
-          <a:ln>
+          <a:ln w="12700">
             <a:solidFill>
               <a:schemeClr val="tx1"/>
             </a:solidFill>
@@ -3514,13 +3996,13 @@
         </p:nvCxnSpPr>
         <p:spPr>
           <a:xfrm flipH="1">
-            <a:off x="1521561" y="2597836"/>
-            <a:ext cx="1" cy="291205"/>
+            <a:off x="1521561" y="2371286"/>
+            <a:ext cx="1" cy="289289"/>
           </a:xfrm>
           <a:prstGeom prst="straightConnector1">
             <a:avLst/>
           </a:prstGeom>
-          <a:ln>
+          <a:ln w="12700">
             <a:solidFill>
               <a:schemeClr val="tx1"/>
             </a:solidFill>
@@ -3559,13 +4041,13 @@
         </p:nvCxnSpPr>
         <p:spPr>
           <a:xfrm>
-            <a:off x="1521561" y="3433455"/>
-            <a:ext cx="0" cy="306962"/>
+            <a:off x="1521561" y="3204989"/>
+            <a:ext cx="0" cy="306828"/>
           </a:xfrm>
           <a:prstGeom prst="straightConnector1">
             <a:avLst/>
           </a:prstGeom>
-          <a:ln>
+          <a:ln w="12700">
             <a:solidFill>
               <a:schemeClr val="tx1"/>
             </a:solidFill>
@@ -3597,6 +4079,7 @@
             </a:extLst>
           </p:cNvPr>
           <p:cNvCxnSpPr>
+            <a:cxnSpLocks/>
             <a:stCxn id="7" idx="2"/>
             <a:endCxn id="4" idx="0"/>
           </p:cNvCxnSpPr>
@@ -3604,17 +4087,17 @@
         </p:nvCxnSpPr>
         <p:spPr>
           <a:xfrm rot="5400000" flipH="1">
-            <a:off x="-23065" y="2740205"/>
-            <a:ext cx="3089252" cy="12700"/>
+            <a:off x="-4264" y="2530406"/>
+            <a:ext cx="3051650" cy="12700"/>
           </a:xfrm>
           <a:prstGeom prst="bentConnector5">
             <a:avLst>
-              <a:gd name="adj1" fmla="val -7400"/>
+              <a:gd name="adj1" fmla="val -7491"/>
               <a:gd name="adj2" fmla="val 8732417"/>
-              <a:gd name="adj3" fmla="val 107400"/>
+              <a:gd name="adj3" fmla="val 107491"/>
             </a:avLst>
           </a:prstGeom>
-          <a:ln>
+          <a:ln w="12700">
             <a:solidFill>
               <a:schemeClr val="tx1"/>
             </a:solidFill>
@@ -3658,7 +4141,7 @@
         </p:blipFill>
         <p:spPr>
           <a:xfrm>
-            <a:off x="956251" y="4898470"/>
+            <a:off x="965775" y="4525090"/>
             <a:ext cx="1130621" cy="923821"/>
           </a:xfrm>
           <a:prstGeom prst="rect">
@@ -3676,6 +4159,7 @@
             </a:extLst>
           </p:cNvPr>
           <p:cNvCxnSpPr>
+            <a:cxnSpLocks/>
             <a:stCxn id="7" idx="2"/>
             <a:endCxn id="49" idx="0"/>
           </p:cNvCxnSpPr>
@@ -3683,13 +4167,13 @@
         </p:nvCxnSpPr>
         <p:spPr>
           <a:xfrm>
-            <a:off x="1521561" y="4284831"/>
-            <a:ext cx="1" cy="613639"/>
+            <a:off x="1521561" y="4056231"/>
+            <a:ext cx="9525" cy="468859"/>
           </a:xfrm>
           <a:prstGeom prst="straightConnector1">
             <a:avLst/>
           </a:prstGeom>
-          <a:ln>
+          <a:ln w="12700">
             <a:solidFill>
               <a:schemeClr val="tx1"/>
             </a:solidFill>
@@ -3726,13 +4210,13 @@
           <p:nvPr>
             <p:extLst>
               <p:ext uri="{D42A27DB-BD31-4B8C-83A1-F6EECF244321}">
-                <p14:modId xmlns:p14="http://schemas.microsoft.com/office/powerpoint/2010/main" val="3382722653"/>
+                <p14:modId xmlns:p14="http://schemas.microsoft.com/office/powerpoint/2010/main" val="3095975163"/>
               </p:ext>
             </p:extLst>
           </p:nvPr>
         </p:nvGraphicFramePr>
         <p:xfrm>
-          <a:off x="2832445" y="1041042"/>
+          <a:off x="2832445" y="949602"/>
           <a:ext cx="1080000" cy="900000"/>
         </p:xfrm>
         <a:graphic>
@@ -5618,7 +6102,7 @@
         </p:nvSpPr>
         <p:spPr>
           <a:xfrm>
-            <a:off x="4862869" y="1131042"/>
+            <a:off x="4862869" y="1039602"/>
             <a:ext cx="753247" cy="720000"/>
           </a:xfrm>
           <a:prstGeom prst="roundRect">
@@ -5627,6 +6111,7 @@
           <a:solidFill>
             <a:srgbClr val="E0D4E7"/>
           </a:solidFill>
+          <a:ln w="19050"/>
         </p:spPr>
         <p:style>
           <a:lnRef idx="2">
@@ -5654,6 +6139,8 @@
                 <a:solidFill>
                   <a:schemeClr val="tx1"/>
                 </a:solidFill>
+                <a:latin typeface="Times New Roman" panose="02020603050405020304" pitchFamily="18" charset="0"/>
+                <a:cs typeface="Times New Roman" panose="02020603050405020304" pitchFamily="18" charset="0"/>
               </a:rPr>
               <a:t>Row </a:t>
             </a:r>
@@ -5665,6 +6152,8 @@
                 <a:solidFill>
                   <a:schemeClr val="tx1"/>
                 </a:solidFill>
+                <a:latin typeface="Times New Roman" panose="02020603050405020304" pitchFamily="18" charset="0"/>
+                <a:cs typeface="Times New Roman" panose="02020603050405020304" pitchFamily="18" charset="0"/>
               </a:rPr>
               <a:t>Attn</a:t>
             </a:r>
@@ -5672,6 +6161,8 @@
               <a:solidFill>
                 <a:schemeClr val="tx1"/>
               </a:solidFill>
+              <a:latin typeface="Times New Roman" panose="02020603050405020304" pitchFamily="18" charset="0"/>
+              <a:cs typeface="Times New Roman" panose="02020603050405020304" pitchFamily="18" charset="0"/>
             </a:endParaRPr>
           </a:p>
         </p:txBody>
@@ -5690,7 +6181,7 @@
         </p:nvSpPr>
         <p:spPr>
           <a:xfrm>
-            <a:off x="6741118" y="1131042"/>
+            <a:off x="6741118" y="1039602"/>
             <a:ext cx="757185" cy="720000"/>
           </a:xfrm>
           <a:prstGeom prst="roundRect">
@@ -5699,6 +6190,7 @@
           <a:solidFill>
             <a:srgbClr val="E0D4E7"/>
           </a:solidFill>
+          <a:ln w="19050"/>
         </p:spPr>
         <p:style>
           <a:lnRef idx="2">
@@ -5726,6 +6218,8 @@
                 <a:solidFill>
                   <a:schemeClr val="tx1"/>
                 </a:solidFill>
+                <a:latin typeface="Times New Roman" panose="02020603050405020304" pitchFamily="18" charset="0"/>
+                <a:cs typeface="Times New Roman" panose="02020603050405020304" pitchFamily="18" charset="0"/>
               </a:rPr>
               <a:t>Col </a:t>
             </a:r>
@@ -5737,6 +6231,8 @@
                 <a:solidFill>
                   <a:schemeClr val="tx1"/>
                 </a:solidFill>
+                <a:latin typeface="Times New Roman" panose="02020603050405020304" pitchFamily="18" charset="0"/>
+                <a:cs typeface="Times New Roman" panose="02020603050405020304" pitchFamily="18" charset="0"/>
               </a:rPr>
               <a:t>Attn</a:t>
             </a:r>
@@ -5744,6 +6240,8 @@
               <a:solidFill>
                 <a:schemeClr val="tx1"/>
               </a:solidFill>
+              <a:latin typeface="Times New Roman" panose="02020603050405020304" pitchFamily="18" charset="0"/>
+              <a:cs typeface="Times New Roman" panose="02020603050405020304" pitchFamily="18" charset="0"/>
             </a:endParaRPr>
           </a:p>
         </p:txBody>
@@ -5762,7 +6260,7 @@
         </p:nvSpPr>
         <p:spPr>
           <a:xfrm>
-            <a:off x="6241968" y="2473333"/>
+            <a:off x="6241968" y="2176153"/>
             <a:ext cx="1760832" cy="720000"/>
           </a:xfrm>
           <a:prstGeom prst="roundRect">
@@ -5771,6 +6269,7 @@
           <a:solidFill>
             <a:srgbClr val="F8CECC"/>
           </a:solidFill>
+          <a:ln w="19050"/>
         </p:spPr>
         <p:style>
           <a:lnRef idx="2">
@@ -5798,6 +6297,8 @@
                 <a:solidFill>
                   <a:schemeClr val="tx1"/>
                 </a:solidFill>
+                <a:latin typeface="Times New Roman" panose="02020603050405020304" pitchFamily="18" charset="0"/>
+                <a:cs typeface="Times New Roman" panose="02020603050405020304" pitchFamily="18" charset="0"/>
               </a:rPr>
               <a:t>Outer </a:t>
             </a:r>
@@ -5809,6 +6310,8 @@
                 <a:solidFill>
                   <a:schemeClr val="tx1"/>
                 </a:solidFill>
+                <a:latin typeface="Times New Roman" panose="02020603050405020304" pitchFamily="18" charset="0"/>
+                <a:cs typeface="Times New Roman" panose="02020603050405020304" pitchFamily="18" charset="0"/>
               </a:rPr>
               <a:t>Product</a:t>
             </a:r>
@@ -5816,6 +6319,8 @@
               <a:solidFill>
                 <a:schemeClr val="tx1"/>
               </a:solidFill>
+              <a:latin typeface="Times New Roman" panose="02020603050405020304" pitchFamily="18" charset="0"/>
+              <a:cs typeface="Times New Roman" panose="02020603050405020304" pitchFamily="18" charset="0"/>
             </a:endParaRPr>
           </a:p>
         </p:txBody>
@@ -5834,15 +6339,19 @@
         </p:nvSpPr>
         <p:spPr>
           <a:xfrm>
-            <a:off x="8623307" y="1131042"/>
+            <a:off x="8623307" y="1039602"/>
             <a:ext cx="847544" cy="720000"/>
           </a:xfrm>
           <a:prstGeom prst="roundRect">
             <a:avLst/>
           </a:prstGeom>
           <a:solidFill>
-            <a:srgbClr val="9FEBF3"/>
+            <a:schemeClr val="accent2">
+              <a:lumMod val="20000"/>
+              <a:lumOff val="80000"/>
+            </a:schemeClr>
           </a:solidFill>
+          <a:ln w="19050"/>
         </p:spPr>
         <p:style>
           <a:lnRef idx="2">
@@ -5870,6 +6379,8 @@
                 <a:solidFill>
                   <a:schemeClr val="tx1"/>
                 </a:solidFill>
+                <a:latin typeface="Times New Roman" panose="02020603050405020304" pitchFamily="18" charset="0"/>
+                <a:cs typeface="Times New Roman" panose="02020603050405020304" pitchFamily="18" charset="0"/>
               </a:rPr>
               <a:t>Feed-</a:t>
             </a:r>
@@ -5881,6 +6392,8 @@
                 <a:solidFill>
                   <a:schemeClr val="tx1"/>
                 </a:solidFill>
+                <a:latin typeface="Times New Roman" panose="02020603050405020304" pitchFamily="18" charset="0"/>
+                <a:cs typeface="Times New Roman" panose="02020603050405020304" pitchFamily="18" charset="0"/>
               </a:rPr>
               <a:t>Forward</a:t>
             </a:r>
@@ -5888,6 +6401,8 @@
               <a:solidFill>
                 <a:schemeClr val="tx1"/>
               </a:solidFill>
+              <a:latin typeface="Times New Roman" panose="02020603050405020304" pitchFamily="18" charset="0"/>
+              <a:cs typeface="Times New Roman" panose="02020603050405020304" pitchFamily="18" charset="0"/>
             </a:endParaRPr>
           </a:p>
         </p:txBody>
@@ -5907,13 +6422,13 @@
           <p:nvPr>
             <p:extLst>
               <p:ext uri="{D42A27DB-BD31-4B8C-83A1-F6EECF244321}">
-                <p14:modId xmlns:p14="http://schemas.microsoft.com/office/powerpoint/2010/main" val="3499222399"/>
+                <p14:modId xmlns:p14="http://schemas.microsoft.com/office/powerpoint/2010/main" val="243926330"/>
               </p:ext>
             </p:extLst>
           </p:nvPr>
         </p:nvGraphicFramePr>
         <p:xfrm>
-          <a:off x="2832445" y="3542993"/>
+          <a:off x="2832445" y="3177233"/>
           <a:ext cx="1080000" cy="1080000"/>
         </p:xfrm>
         <a:graphic>
@@ -8166,7 +8681,7 @@
         </p:nvSpPr>
         <p:spPr>
           <a:xfrm>
-            <a:off x="5604420" y="3722993"/>
+            <a:off x="5604420" y="3357233"/>
             <a:ext cx="882032" cy="720000"/>
           </a:xfrm>
           <a:prstGeom prst="roundRect">
@@ -8178,6 +8693,7 @@
               <a:lumOff val="40000"/>
             </a:schemeClr>
           </a:solidFill>
+          <a:ln w="19050"/>
         </p:spPr>
         <p:style>
           <a:lnRef idx="2">
@@ -8205,6 +8721,8 @@
                 <a:solidFill>
                   <a:schemeClr val="tx1"/>
                 </a:solidFill>
+                <a:latin typeface="Times New Roman" panose="02020603050405020304" pitchFamily="18" charset="0"/>
+                <a:cs typeface="Times New Roman" panose="02020603050405020304" pitchFamily="18" charset="0"/>
               </a:rPr>
               <a:t>Triangle </a:t>
             </a:r>
@@ -8216,6 +8734,8 @@
                 <a:solidFill>
                   <a:schemeClr val="tx1"/>
                 </a:solidFill>
+                <a:latin typeface="Times New Roman" panose="02020603050405020304" pitchFamily="18" charset="0"/>
+                <a:cs typeface="Times New Roman" panose="02020603050405020304" pitchFamily="18" charset="0"/>
               </a:rPr>
               <a:t>Update</a:t>
             </a:r>
@@ -8223,6 +8743,8 @@
               <a:solidFill>
                 <a:schemeClr val="tx1"/>
               </a:solidFill>
+              <a:latin typeface="Times New Roman" panose="02020603050405020304" pitchFamily="18" charset="0"/>
+              <a:cs typeface="Times New Roman" panose="02020603050405020304" pitchFamily="18" charset="0"/>
             </a:endParaRPr>
           </a:p>
         </p:txBody>
@@ -8241,7 +8763,7 @@
         </p:nvSpPr>
         <p:spPr>
           <a:xfrm>
-            <a:off x="6657076" y="3722993"/>
+            <a:off x="6657076" y="3357233"/>
             <a:ext cx="846000" cy="720000"/>
           </a:xfrm>
           <a:prstGeom prst="roundRect">
@@ -8250,6 +8772,7 @@
           <a:solidFill>
             <a:srgbClr val="E0D4E7"/>
           </a:solidFill>
+          <a:ln w="19050"/>
         </p:spPr>
         <p:style>
           <a:lnRef idx="2">
@@ -8277,6 +8800,8 @@
                 <a:solidFill>
                   <a:schemeClr val="tx1"/>
                 </a:solidFill>
+                <a:latin typeface="Times New Roman" panose="02020603050405020304" pitchFamily="18" charset="0"/>
+                <a:cs typeface="Times New Roman" panose="02020603050405020304" pitchFamily="18" charset="0"/>
               </a:rPr>
               <a:t>Triangle </a:t>
             </a:r>
@@ -8288,6 +8813,8 @@
                 <a:solidFill>
                   <a:schemeClr val="tx1"/>
                 </a:solidFill>
+                <a:latin typeface="Times New Roman" panose="02020603050405020304" pitchFamily="18" charset="0"/>
+                <a:cs typeface="Times New Roman" panose="02020603050405020304" pitchFamily="18" charset="0"/>
               </a:rPr>
               <a:t>Attn</a:t>
             </a:r>
@@ -8295,6 +8822,8 @@
               <a:solidFill>
                 <a:schemeClr val="tx1"/>
               </a:solidFill>
+              <a:latin typeface="Times New Roman" panose="02020603050405020304" pitchFamily="18" charset="0"/>
+              <a:cs typeface="Times New Roman" panose="02020603050405020304" pitchFamily="18" charset="0"/>
             </a:endParaRPr>
           </a:p>
         </p:txBody>
@@ -8313,7 +8842,7 @@
         </p:nvSpPr>
         <p:spPr>
           <a:xfrm>
-            <a:off x="8096436" y="3722993"/>
+            <a:off x="8096436" y="3357233"/>
             <a:ext cx="847543" cy="720000"/>
           </a:xfrm>
           <a:prstGeom prst="roundRect">
@@ -8322,6 +8851,7 @@
           <a:solidFill>
             <a:srgbClr val="E0D4E7"/>
           </a:solidFill>
+          <a:ln w="19050"/>
         </p:spPr>
         <p:style>
           <a:lnRef idx="2">
@@ -8349,6 +8879,8 @@
                 <a:solidFill>
                   <a:schemeClr val="tx1"/>
                 </a:solidFill>
+                <a:latin typeface="Times New Roman" panose="02020603050405020304" pitchFamily="18" charset="0"/>
+                <a:cs typeface="Times New Roman" panose="02020603050405020304" pitchFamily="18" charset="0"/>
               </a:rPr>
               <a:t>Triangle </a:t>
             </a:r>
@@ -8360,6 +8892,8 @@
                 <a:solidFill>
                   <a:schemeClr val="tx1"/>
                 </a:solidFill>
+                <a:latin typeface="Times New Roman" panose="02020603050405020304" pitchFamily="18" charset="0"/>
+                <a:cs typeface="Times New Roman" panose="02020603050405020304" pitchFamily="18" charset="0"/>
               </a:rPr>
               <a:t>Attn</a:t>
             </a:r>
@@ -8367,6 +8901,8 @@
               <a:solidFill>
                 <a:schemeClr val="tx1"/>
               </a:solidFill>
+              <a:latin typeface="Times New Roman" panose="02020603050405020304" pitchFamily="18" charset="0"/>
+              <a:cs typeface="Times New Roman" panose="02020603050405020304" pitchFamily="18" charset="0"/>
             </a:endParaRPr>
           </a:p>
         </p:txBody>
@@ -8385,7 +8921,7 @@
         </p:nvSpPr>
         <p:spPr>
           <a:xfrm>
-            <a:off x="4110914" y="3722993"/>
+            <a:off x="4110914" y="3357233"/>
             <a:ext cx="882000" cy="720000"/>
           </a:xfrm>
           <a:prstGeom prst="roundRect">
@@ -8397,6 +8933,7 @@
               <a:lumOff val="40000"/>
             </a:schemeClr>
           </a:solidFill>
+          <a:ln w="19050"/>
         </p:spPr>
         <p:style>
           <a:lnRef idx="2">
@@ -8424,6 +8961,8 @@
                 <a:solidFill>
                   <a:schemeClr val="tx1"/>
                 </a:solidFill>
+                <a:latin typeface="Times New Roman" panose="02020603050405020304" pitchFamily="18" charset="0"/>
+                <a:cs typeface="Times New Roman" panose="02020603050405020304" pitchFamily="18" charset="0"/>
               </a:rPr>
               <a:t>Triangle </a:t>
             </a:r>
@@ -8435,6 +8974,8 @@
                 <a:solidFill>
                   <a:schemeClr val="tx1"/>
                 </a:solidFill>
+                <a:latin typeface="Times New Roman" panose="02020603050405020304" pitchFamily="18" charset="0"/>
+                <a:cs typeface="Times New Roman" panose="02020603050405020304" pitchFamily="18" charset="0"/>
               </a:rPr>
               <a:t>Update</a:t>
             </a:r>
@@ -8442,6 +8983,8 @@
               <a:solidFill>
                 <a:schemeClr val="tx1"/>
               </a:solidFill>
+              <a:latin typeface="Times New Roman" panose="02020603050405020304" pitchFamily="18" charset="0"/>
+              <a:cs typeface="Times New Roman" panose="02020603050405020304" pitchFamily="18" charset="0"/>
             </a:endParaRPr>
           </a:p>
         </p:txBody>
@@ -8461,13 +9004,13 @@
           <p:nvPr>
             <p:extLst>
               <p:ext uri="{D42A27DB-BD31-4B8C-83A1-F6EECF244321}">
-                <p14:modId xmlns:p14="http://schemas.microsoft.com/office/powerpoint/2010/main" val="59249571"/>
+                <p14:modId xmlns:p14="http://schemas.microsoft.com/office/powerpoint/2010/main" val="1962810067"/>
               </p:ext>
             </p:extLst>
           </p:nvPr>
         </p:nvGraphicFramePr>
         <p:xfrm>
-          <a:off x="10687164" y="1041042"/>
+          <a:off x="10687164" y="949602"/>
           <a:ext cx="1080000" cy="900000"/>
         </p:xfrm>
         <a:graphic>
@@ -10385,13 +10928,13 @@
           <p:nvPr>
             <p:extLst>
               <p:ext uri="{D42A27DB-BD31-4B8C-83A1-F6EECF244321}">
-                <p14:modId xmlns:p14="http://schemas.microsoft.com/office/powerpoint/2010/main" val="311010635"/>
+                <p14:modId xmlns:p14="http://schemas.microsoft.com/office/powerpoint/2010/main" val="4151763453"/>
               </p:ext>
             </p:extLst>
           </p:nvPr>
         </p:nvGraphicFramePr>
         <p:xfrm>
-          <a:off x="10687164" y="3542993"/>
+          <a:off x="10687164" y="3177233"/>
           <a:ext cx="1080000" cy="1080000"/>
         </p:xfrm>
         <a:graphic>
@@ -12643,7 +13186,7 @@
         </p:nvSpPr>
         <p:spPr>
           <a:xfrm>
-            <a:off x="7949204" y="1131042"/>
+            <a:off x="7949204" y="1039602"/>
             <a:ext cx="223200" cy="720000"/>
           </a:xfrm>
           <a:prstGeom prst="roundRect">
@@ -12655,6 +13198,7 @@
               <a:lumOff val="60000"/>
             </a:schemeClr>
           </a:solidFill>
+          <a:ln w="19050"/>
         </p:spPr>
         <p:style>
           <a:lnRef idx="2">
@@ -12682,6 +13226,8 @@
                 <a:solidFill>
                   <a:schemeClr val="tx1"/>
                 </a:solidFill>
+                <a:latin typeface="Times New Roman" panose="02020603050405020304" pitchFamily="18" charset="0"/>
+                <a:cs typeface="Times New Roman" panose="02020603050405020304" pitchFamily="18" charset="0"/>
               </a:rPr>
               <a:t>T</a:t>
             </a:r>
@@ -12689,6 +13235,8 @@
               <a:solidFill>
                 <a:schemeClr val="tx1"/>
               </a:solidFill>
+              <a:latin typeface="Times New Roman" panose="02020603050405020304" pitchFamily="18" charset="0"/>
+              <a:cs typeface="Times New Roman" panose="02020603050405020304" pitchFamily="18" charset="0"/>
             </a:endParaRPr>
           </a:p>
         </p:txBody>
@@ -12707,7 +13255,7 @@
         </p:nvSpPr>
         <p:spPr>
           <a:xfrm>
-            <a:off x="6067017" y="1131042"/>
+            <a:off x="6067017" y="1039602"/>
             <a:ext cx="223200" cy="720000"/>
           </a:xfrm>
           <a:prstGeom prst="roundRect">
@@ -12719,6 +13267,7 @@
               <a:lumOff val="60000"/>
             </a:schemeClr>
           </a:solidFill>
+          <a:ln w="19050"/>
         </p:spPr>
         <p:style>
           <a:lnRef idx="2">
@@ -12746,6 +13295,8 @@
                 <a:solidFill>
                   <a:schemeClr val="tx1"/>
                 </a:solidFill>
+                <a:latin typeface="Times New Roman" panose="02020603050405020304" pitchFamily="18" charset="0"/>
+                <a:cs typeface="Times New Roman" panose="02020603050405020304" pitchFamily="18" charset="0"/>
               </a:rPr>
               <a:t>T</a:t>
             </a:r>
@@ -12753,6 +13304,8 @@
               <a:solidFill>
                 <a:schemeClr val="tx1"/>
               </a:solidFill>
+              <a:latin typeface="Times New Roman" panose="02020603050405020304" pitchFamily="18" charset="0"/>
+              <a:cs typeface="Times New Roman" panose="02020603050405020304" pitchFamily="18" charset="0"/>
             </a:endParaRPr>
           </a:p>
         </p:txBody>
@@ -12775,13 +13328,13 @@
         </p:nvCxnSpPr>
         <p:spPr>
           <a:xfrm>
-            <a:off x="3912445" y="1491042"/>
+            <a:off x="3912445" y="1399602"/>
             <a:ext cx="950424" cy="0"/>
           </a:xfrm>
           <a:prstGeom prst="straightConnector1">
             <a:avLst/>
           </a:prstGeom>
-          <a:ln>
+          <a:ln w="12700">
             <a:solidFill>
               <a:schemeClr val="tx1"/>
             </a:solidFill>
@@ -12821,13 +13374,13 @@
         </p:nvCxnSpPr>
         <p:spPr>
           <a:xfrm>
-            <a:off x="5616116" y="1491042"/>
+            <a:off x="5616116" y="1399602"/>
             <a:ext cx="450901" cy="0"/>
           </a:xfrm>
           <a:prstGeom prst="straightConnector1">
             <a:avLst/>
           </a:prstGeom>
-          <a:ln>
+          <a:ln w="12700">
             <a:solidFill>
               <a:schemeClr val="tx1"/>
             </a:solidFill>
@@ -12867,13 +13420,13 @@
         </p:nvCxnSpPr>
         <p:spPr>
           <a:xfrm>
-            <a:off x="6290217" y="1491042"/>
+            <a:off x="6290217" y="1399602"/>
             <a:ext cx="450901" cy="0"/>
           </a:xfrm>
           <a:prstGeom prst="straightConnector1">
             <a:avLst/>
           </a:prstGeom>
-          <a:ln>
+          <a:ln w="12700">
             <a:solidFill>
               <a:schemeClr val="tx1"/>
             </a:solidFill>
@@ -12913,13 +13466,13 @@
         </p:nvCxnSpPr>
         <p:spPr>
           <a:xfrm>
-            <a:off x="7498303" y="1491042"/>
+            <a:off x="7498303" y="1399602"/>
             <a:ext cx="450901" cy="0"/>
           </a:xfrm>
           <a:prstGeom prst="straightConnector1">
             <a:avLst/>
           </a:prstGeom>
-          <a:ln>
+          <a:ln w="12700">
             <a:solidFill>
               <a:schemeClr val="tx1"/>
             </a:solidFill>
@@ -12959,111 +13512,13 @@
         </p:nvCxnSpPr>
         <p:spPr>
           <a:xfrm>
-            <a:off x="8172404" y="1491042"/>
+            <a:off x="8172404" y="1399602"/>
             <a:ext cx="450903" cy="0"/>
           </a:xfrm>
           <a:prstGeom prst="straightConnector1">
             <a:avLst/>
           </a:prstGeom>
-          <a:ln>
-            <a:solidFill>
-              <a:schemeClr val="tx1"/>
-            </a:solidFill>
-            <a:tailEnd type="triangle"/>
-          </a:ln>
-        </p:spPr>
-        <p:style>
-          <a:lnRef idx="1">
-            <a:schemeClr val="accent1"/>
-          </a:lnRef>
-          <a:fillRef idx="0">
-            <a:schemeClr val="accent1"/>
-          </a:fillRef>
-          <a:effectRef idx="0">
-            <a:schemeClr val="accent1"/>
-          </a:effectRef>
-          <a:fontRef idx="minor">
-            <a:schemeClr val="tx1"/>
-          </a:fontRef>
-        </p:style>
-      </p:cxnSp>
-      <p:cxnSp>
-        <p:nvCxnSpPr>
-          <p:cNvPr id="22" name="直接箭头连接符 21">
-            <a:extLst>
-              <a:ext uri="{FF2B5EF4-FFF2-40B4-BE49-F238E27FC236}">
-                <a16:creationId xmlns:a16="http://schemas.microsoft.com/office/drawing/2014/main" id="{2C4939BB-E474-0419-4037-4824B5A84BD4}"/>
-              </a:ext>
-            </a:extLst>
-          </p:cNvPr>
-          <p:cNvCxnSpPr>
-            <a:cxnSpLocks/>
-            <a:stCxn id="74" idx="3"/>
-            <a:endCxn id="73" idx="0"/>
-          </p:cNvCxnSpPr>
-          <p:nvPr/>
-        </p:nvCxnSpPr>
-        <p:spPr>
-          <a:xfrm flipH="1">
-            <a:off x="7122384" y="1491042"/>
-            <a:ext cx="2348467" cy="982291"/>
-          </a:xfrm>
-          <a:prstGeom prst="curvedConnector4">
-            <a:avLst>
-              <a:gd name="adj1" fmla="val -9734"/>
-              <a:gd name="adj2" fmla="val 68324"/>
-            </a:avLst>
-          </a:prstGeom>
-          <a:ln>
-            <a:solidFill>
-              <a:schemeClr val="tx1"/>
-            </a:solidFill>
-            <a:tailEnd type="triangle"/>
-          </a:ln>
-        </p:spPr>
-        <p:style>
-          <a:lnRef idx="1">
-            <a:schemeClr val="accent1"/>
-          </a:lnRef>
-          <a:fillRef idx="0">
-            <a:schemeClr val="accent1"/>
-          </a:fillRef>
-          <a:effectRef idx="0">
-            <a:schemeClr val="accent1"/>
-          </a:effectRef>
-          <a:fontRef idx="minor">
-            <a:schemeClr val="tx1"/>
-          </a:fontRef>
-        </p:style>
-      </p:cxnSp>
-      <p:cxnSp>
-        <p:nvCxnSpPr>
-          <p:cNvPr id="27" name="直接箭头连接符 26">
-            <a:extLst>
-              <a:ext uri="{FF2B5EF4-FFF2-40B4-BE49-F238E27FC236}">
-                <a16:creationId xmlns:a16="http://schemas.microsoft.com/office/drawing/2014/main" id="{B9D2648E-162A-F798-3F86-1BDACD4D9EBC}"/>
-              </a:ext>
-            </a:extLst>
-          </p:cNvPr>
-          <p:cNvCxnSpPr>
-            <a:cxnSpLocks/>
-            <a:stCxn id="73" idx="2"/>
-            <a:endCxn id="80" idx="1"/>
-          </p:cNvCxnSpPr>
-          <p:nvPr/>
-        </p:nvCxnSpPr>
-        <p:spPr>
-          <a:xfrm rot="5400000">
-            <a:off x="5171819" y="2132428"/>
-            <a:ext cx="889660" cy="3011470"/>
-          </a:xfrm>
-          <a:prstGeom prst="curvedConnector4">
-            <a:avLst>
-              <a:gd name="adj1" fmla="val 29768"/>
-              <a:gd name="adj2" fmla="val 107591"/>
-            </a:avLst>
-          </a:prstGeom>
-          <a:ln>
+          <a:ln w="12700">
             <a:solidFill>
               <a:schemeClr val="tx1"/>
             </a:solidFill>
@@ -13099,7 +13554,7 @@
         </p:nvSpPr>
         <p:spPr>
           <a:xfrm>
-            <a:off x="5190480" y="3722993"/>
+            <a:off x="5190480" y="3357233"/>
             <a:ext cx="220609" cy="720000"/>
           </a:xfrm>
           <a:prstGeom prst="roundRect">
@@ -13111,6 +13566,7 @@
               <a:lumOff val="60000"/>
             </a:schemeClr>
           </a:solidFill>
+          <a:ln w="19050"/>
         </p:spPr>
         <p:style>
           <a:lnRef idx="2">
@@ -13138,6 +13594,8 @@
                 <a:solidFill>
                   <a:schemeClr val="tx1"/>
                 </a:solidFill>
+                <a:latin typeface="Times New Roman" panose="02020603050405020304" pitchFamily="18" charset="0"/>
+                <a:cs typeface="Times New Roman" panose="02020603050405020304" pitchFamily="18" charset="0"/>
               </a:rPr>
               <a:t>T’</a:t>
             </a:r>
@@ -13145,6 +13603,8 @@
               <a:solidFill>
                 <a:schemeClr val="tx1"/>
               </a:solidFill>
+              <a:latin typeface="Times New Roman" panose="02020603050405020304" pitchFamily="18" charset="0"/>
+              <a:cs typeface="Times New Roman" panose="02020603050405020304" pitchFamily="18" charset="0"/>
             </a:endParaRPr>
           </a:p>
         </p:txBody>
@@ -13163,7 +13623,7 @@
         </p:nvSpPr>
         <p:spPr>
           <a:xfrm>
-            <a:off x="7684968" y="3722993"/>
+            <a:off x="7684968" y="3357233"/>
             <a:ext cx="224197" cy="720000"/>
           </a:xfrm>
           <a:prstGeom prst="roundRect">
@@ -13175,6 +13635,7 @@
               <a:lumOff val="60000"/>
             </a:schemeClr>
           </a:solidFill>
+          <a:ln w="19050"/>
         </p:spPr>
         <p:style>
           <a:lnRef idx="2">
@@ -13202,6 +13663,8 @@
                 <a:solidFill>
                   <a:schemeClr val="tx1"/>
                 </a:solidFill>
+                <a:latin typeface="Times New Roman" panose="02020603050405020304" pitchFamily="18" charset="0"/>
+                <a:cs typeface="Times New Roman" panose="02020603050405020304" pitchFamily="18" charset="0"/>
               </a:rPr>
               <a:t>T</a:t>
             </a:r>
@@ -13209,6 +13672,8 @@
               <a:solidFill>
                 <a:schemeClr val="tx1"/>
               </a:solidFill>
+              <a:latin typeface="Times New Roman" panose="02020603050405020304" pitchFamily="18" charset="0"/>
+              <a:cs typeface="Times New Roman" panose="02020603050405020304" pitchFamily="18" charset="0"/>
             </a:endParaRPr>
           </a:p>
         </p:txBody>
@@ -13227,7 +13692,7 @@
         </p:nvSpPr>
         <p:spPr>
           <a:xfrm>
-            <a:off x="9139662" y="3722993"/>
+            <a:off x="9139662" y="3357233"/>
             <a:ext cx="224198" cy="720000"/>
           </a:xfrm>
           <a:prstGeom prst="roundRect">
@@ -13239,6 +13704,7 @@
               <a:lumOff val="60000"/>
             </a:schemeClr>
           </a:solidFill>
+          <a:ln w="19050"/>
         </p:spPr>
         <p:style>
           <a:lnRef idx="2">
@@ -13266,6 +13732,8 @@
                 <a:solidFill>
                   <a:schemeClr val="tx1"/>
                 </a:solidFill>
+                <a:latin typeface="Times New Roman" panose="02020603050405020304" pitchFamily="18" charset="0"/>
+                <a:cs typeface="Times New Roman" panose="02020603050405020304" pitchFamily="18" charset="0"/>
               </a:rPr>
               <a:t>T</a:t>
             </a:r>
@@ -13273,6 +13741,8 @@
               <a:solidFill>
                 <a:schemeClr val="tx1"/>
               </a:solidFill>
+              <a:latin typeface="Times New Roman" panose="02020603050405020304" pitchFamily="18" charset="0"/>
+              <a:cs typeface="Times New Roman" panose="02020603050405020304" pitchFamily="18" charset="0"/>
             </a:endParaRPr>
           </a:p>
         </p:txBody>
@@ -13295,13 +13765,13 @@
         </p:nvCxnSpPr>
         <p:spPr>
           <a:xfrm>
-            <a:off x="4992914" y="4082993"/>
+            <a:off x="4992914" y="3717233"/>
             <a:ext cx="197566" cy="0"/>
           </a:xfrm>
           <a:prstGeom prst="straightConnector1">
             <a:avLst/>
           </a:prstGeom>
-          <a:ln>
+          <a:ln w="12700">
             <a:solidFill>
               <a:schemeClr val="tx1"/>
             </a:solidFill>
@@ -13341,13 +13811,13 @@
         </p:nvCxnSpPr>
         <p:spPr>
           <a:xfrm>
-            <a:off x="5411089" y="4082993"/>
+            <a:off x="5411089" y="3717233"/>
             <a:ext cx="193331" cy="0"/>
           </a:xfrm>
           <a:prstGeom prst="straightConnector1">
             <a:avLst/>
           </a:prstGeom>
-          <a:ln>
+          <a:ln w="12700">
             <a:solidFill>
               <a:schemeClr val="tx1"/>
             </a:solidFill>
@@ -13386,13 +13856,13 @@
         </p:nvCxnSpPr>
         <p:spPr>
           <a:xfrm>
-            <a:off x="6486452" y="4082993"/>
+            <a:off x="6486452" y="3717233"/>
             <a:ext cx="170624" cy="0"/>
           </a:xfrm>
           <a:prstGeom prst="straightConnector1">
             <a:avLst/>
           </a:prstGeom>
-          <a:ln>
+          <a:ln w="12700">
             <a:solidFill>
               <a:schemeClr val="tx1"/>
             </a:solidFill>
@@ -13431,13 +13901,13 @@
         </p:nvCxnSpPr>
         <p:spPr>
           <a:xfrm>
-            <a:off x="7503076" y="4082993"/>
+            <a:off x="7503076" y="3717233"/>
             <a:ext cx="181892" cy="0"/>
           </a:xfrm>
           <a:prstGeom prst="straightConnector1">
             <a:avLst/>
           </a:prstGeom>
-          <a:ln>
+          <a:ln w="12700">
             <a:solidFill>
               <a:schemeClr val="tx1"/>
             </a:solidFill>
@@ -13476,13 +13946,13 @@
         </p:nvCxnSpPr>
         <p:spPr>
           <a:xfrm>
-            <a:off x="7909165" y="4082993"/>
+            <a:off x="7909165" y="3717233"/>
             <a:ext cx="187271" cy="0"/>
           </a:xfrm>
           <a:prstGeom prst="straightConnector1">
             <a:avLst/>
           </a:prstGeom>
-          <a:ln>
+          <a:ln w="12700">
             <a:solidFill>
               <a:schemeClr val="tx1"/>
             </a:solidFill>
@@ -13521,13 +13991,13 @@
         </p:nvCxnSpPr>
         <p:spPr>
           <a:xfrm>
-            <a:off x="8943979" y="4082993"/>
+            <a:off x="8943979" y="3717233"/>
             <a:ext cx="195683" cy="0"/>
           </a:xfrm>
           <a:prstGeom prst="straightConnector1">
             <a:avLst/>
           </a:prstGeom>
-          <a:ln>
+          <a:ln w="12700">
             <a:solidFill>
               <a:schemeClr val="tx1"/>
             </a:solidFill>
@@ -13563,15 +14033,19 @@
         </p:nvSpPr>
         <p:spPr>
           <a:xfrm>
-            <a:off x="9574021" y="3722993"/>
+            <a:off x="9574021" y="3357233"/>
             <a:ext cx="847544" cy="720000"/>
           </a:xfrm>
           <a:prstGeom prst="roundRect">
             <a:avLst/>
           </a:prstGeom>
           <a:solidFill>
-            <a:srgbClr val="9FEBF3"/>
+            <a:schemeClr val="accent2">
+              <a:lumMod val="20000"/>
+              <a:lumOff val="80000"/>
+            </a:schemeClr>
           </a:solidFill>
+          <a:ln w="19050"/>
         </p:spPr>
         <p:style>
           <a:lnRef idx="2">
@@ -13599,6 +14073,8 @@
                 <a:solidFill>
                   <a:schemeClr val="tx1"/>
                 </a:solidFill>
+                <a:latin typeface="Times New Roman" panose="02020603050405020304" pitchFamily="18" charset="0"/>
+                <a:cs typeface="Times New Roman" panose="02020603050405020304" pitchFamily="18" charset="0"/>
               </a:rPr>
               <a:t>Feed-</a:t>
             </a:r>
@@ -13610,6 +14086,8 @@
                 <a:solidFill>
                   <a:schemeClr val="tx1"/>
                 </a:solidFill>
+                <a:latin typeface="Times New Roman" panose="02020603050405020304" pitchFamily="18" charset="0"/>
+                <a:cs typeface="Times New Roman" panose="02020603050405020304" pitchFamily="18" charset="0"/>
               </a:rPr>
               <a:t>Forward</a:t>
             </a:r>
@@ -13617,6 +14095,8 @@
               <a:solidFill>
                 <a:schemeClr val="tx1"/>
               </a:solidFill>
+              <a:latin typeface="Times New Roman" panose="02020603050405020304" pitchFamily="18" charset="0"/>
+              <a:cs typeface="Times New Roman" panose="02020603050405020304" pitchFamily="18" charset="0"/>
             </a:endParaRPr>
           </a:p>
         </p:txBody>
@@ -13638,13 +14118,13 @@
         </p:nvCxnSpPr>
         <p:spPr>
           <a:xfrm>
-            <a:off x="9363860" y="4082993"/>
+            <a:off x="9363860" y="3717233"/>
             <a:ext cx="210161" cy="0"/>
           </a:xfrm>
           <a:prstGeom prst="straightConnector1">
             <a:avLst/>
           </a:prstGeom>
-          <a:ln>
+          <a:ln w="12700">
             <a:solidFill>
               <a:schemeClr val="tx1"/>
             </a:solidFill>
@@ -13683,13 +14163,13 @@
         </p:nvCxnSpPr>
         <p:spPr>
           <a:xfrm>
-            <a:off x="10421565" y="4082993"/>
+            <a:off x="10421565" y="3717233"/>
             <a:ext cx="265599" cy="0"/>
           </a:xfrm>
           <a:prstGeom prst="straightConnector1">
             <a:avLst/>
           </a:prstGeom>
-          <a:ln>
+          <a:ln w="12700">
             <a:solidFill>
               <a:schemeClr val="tx1"/>
             </a:solidFill>
@@ -13727,7 +14207,7 @@
         </p:nvCxnSpPr>
         <p:spPr>
           <a:xfrm flipV="1">
-            <a:off x="3713480" y="4082993"/>
+            <a:off x="3713480" y="3717233"/>
             <a:ext cx="397434" cy="2268"/>
           </a:xfrm>
           <a:prstGeom prst="straightConnector1">
@@ -13772,13 +14252,13 @@
         </p:nvCxnSpPr>
         <p:spPr>
           <a:xfrm>
-            <a:off x="9470851" y="1491042"/>
+            <a:off x="9470851" y="1399602"/>
             <a:ext cx="1216313" cy="0"/>
           </a:xfrm>
           <a:prstGeom prst="straightConnector1">
             <a:avLst/>
           </a:prstGeom>
-          <a:ln>
+          <a:ln w="12700">
             <a:solidFill>
               <a:schemeClr val="tx1"/>
             </a:solidFill>
@@ -13814,7 +14294,7 @@
         </p:nvSpPr>
         <p:spPr>
           <a:xfrm>
-            <a:off x="2577148" y="2101694"/>
+            <a:off x="2577148" y="2010254"/>
             <a:ext cx="1590595" cy="523220"/>
           </a:xfrm>
           <a:prstGeom prst="rect">
@@ -13830,17 +14310,26 @@
           <a:p>
             <a:pPr algn="ctr"/>
             <a:r>
-              <a:rPr lang="en-US" altLang="zh-CN" sz="1400" dirty="0"/>
+              <a:rPr lang="en-US" altLang="zh-CN" sz="1400" dirty="0">
+                <a:latin typeface="Times New Roman" panose="02020603050405020304" pitchFamily="18" charset="0"/>
+                <a:cs typeface="Times New Roman" panose="02020603050405020304" pitchFamily="18" charset="0"/>
+              </a:rPr>
               <a:t>MSA representation</a:t>
             </a:r>
           </a:p>
           <a:p>
             <a:pPr algn="ctr"/>
             <a:r>
-              <a:rPr lang="en-US" altLang="zh-CN" sz="1400" dirty="0"/>
+              <a:rPr lang="en-US" altLang="zh-CN" sz="1400" dirty="0">
+                <a:latin typeface="Times New Roman" panose="02020603050405020304" pitchFamily="18" charset="0"/>
+                <a:cs typeface="Times New Roman" panose="02020603050405020304" pitchFamily="18" charset="0"/>
+              </a:rPr>
               <a:t>(Ns, Nr, H)</a:t>
             </a:r>
-            <a:endParaRPr lang="zh-CN" altLang="en-US" sz="1400" dirty="0"/>
+            <a:endParaRPr lang="zh-CN" altLang="en-US" sz="1400" dirty="0">
+              <a:latin typeface="Times New Roman" panose="02020603050405020304" pitchFamily="18" charset="0"/>
+              <a:cs typeface="Times New Roman" panose="02020603050405020304" pitchFamily="18" charset="0"/>
+            </a:endParaRPr>
           </a:p>
         </p:txBody>
       </p:sp>
@@ -13858,7 +14347,7 @@
         </p:nvSpPr>
         <p:spPr>
           <a:xfrm>
-            <a:off x="2577148" y="4819666"/>
+            <a:off x="2577148" y="4453906"/>
             <a:ext cx="1590595" cy="523220"/>
           </a:xfrm>
           <a:prstGeom prst="rect">
@@ -13874,17 +14363,26 @@
           <a:p>
             <a:pPr algn="ctr"/>
             <a:r>
-              <a:rPr lang="en-US" altLang="zh-CN" sz="1400" dirty="0"/>
+              <a:rPr lang="en-US" altLang="zh-CN" sz="1400" dirty="0">
+                <a:latin typeface="Times New Roman" panose="02020603050405020304" pitchFamily="18" charset="0"/>
+                <a:cs typeface="Times New Roman" panose="02020603050405020304" pitchFamily="18" charset="0"/>
+              </a:rPr>
               <a:t>Pair representation</a:t>
             </a:r>
           </a:p>
           <a:p>
             <a:pPr algn="ctr"/>
             <a:r>
-              <a:rPr lang="en-US" altLang="zh-CN" sz="1400" dirty="0"/>
+              <a:rPr lang="en-US" altLang="zh-CN" sz="1400" dirty="0">
+                <a:latin typeface="Times New Roman" panose="02020603050405020304" pitchFamily="18" charset="0"/>
+                <a:cs typeface="Times New Roman" panose="02020603050405020304" pitchFamily="18" charset="0"/>
+              </a:rPr>
               <a:t>(Nr, Nr, H)</a:t>
             </a:r>
-            <a:endParaRPr lang="zh-CN" altLang="en-US" sz="1400" dirty="0"/>
+            <a:endParaRPr lang="zh-CN" altLang="en-US" sz="1400" dirty="0">
+              <a:latin typeface="Times New Roman" panose="02020603050405020304" pitchFamily="18" charset="0"/>
+              <a:cs typeface="Times New Roman" panose="02020603050405020304" pitchFamily="18" charset="0"/>
+            </a:endParaRPr>
           </a:p>
         </p:txBody>
       </p:sp>
@@ -13902,7 +14400,7 @@
         </p:nvSpPr>
         <p:spPr>
           <a:xfrm>
-            <a:off x="10431867" y="2199289"/>
+            <a:off x="10431867" y="2107849"/>
             <a:ext cx="1590595" cy="523220"/>
           </a:xfrm>
           <a:prstGeom prst="rect">
@@ -13918,17 +14416,26 @@
           <a:p>
             <a:pPr algn="ctr"/>
             <a:r>
-              <a:rPr lang="en-US" altLang="zh-CN" sz="1400" dirty="0"/>
+              <a:rPr lang="en-US" altLang="zh-CN" sz="1400" dirty="0">
+                <a:latin typeface="Times New Roman" panose="02020603050405020304" pitchFamily="18" charset="0"/>
+                <a:cs typeface="Times New Roman" panose="02020603050405020304" pitchFamily="18" charset="0"/>
+              </a:rPr>
               <a:t>MSA representation</a:t>
             </a:r>
           </a:p>
           <a:p>
             <a:pPr algn="ctr"/>
             <a:r>
-              <a:rPr lang="en-US" altLang="zh-CN" sz="1400" dirty="0"/>
+              <a:rPr lang="en-US" altLang="zh-CN" sz="1400" dirty="0">
+                <a:latin typeface="Times New Roman" panose="02020603050405020304" pitchFamily="18" charset="0"/>
+                <a:cs typeface="Times New Roman" panose="02020603050405020304" pitchFamily="18" charset="0"/>
+              </a:rPr>
               <a:t>(Ns, Nr, H)</a:t>
             </a:r>
-            <a:endParaRPr lang="zh-CN" altLang="en-US" sz="1400" dirty="0"/>
+            <a:endParaRPr lang="zh-CN" altLang="en-US" sz="1400" dirty="0">
+              <a:latin typeface="Times New Roman" panose="02020603050405020304" pitchFamily="18" charset="0"/>
+              <a:cs typeface="Times New Roman" panose="02020603050405020304" pitchFamily="18" charset="0"/>
+            </a:endParaRPr>
           </a:p>
         </p:txBody>
       </p:sp>
@@ -13946,7 +14453,7 @@
         </p:nvSpPr>
         <p:spPr>
           <a:xfrm>
-            <a:off x="10431867" y="4804298"/>
+            <a:off x="10431867" y="4438538"/>
             <a:ext cx="1590595" cy="523220"/>
           </a:xfrm>
           <a:prstGeom prst="rect">
@@ -13962,17 +14469,26 @@
           <a:p>
             <a:pPr algn="ctr"/>
             <a:r>
-              <a:rPr lang="en-US" altLang="zh-CN" sz="1400" dirty="0"/>
+              <a:rPr lang="en-US" altLang="zh-CN" sz="1400" dirty="0">
+                <a:latin typeface="Times New Roman" panose="02020603050405020304" pitchFamily="18" charset="0"/>
+                <a:cs typeface="Times New Roman" panose="02020603050405020304" pitchFamily="18" charset="0"/>
+              </a:rPr>
               <a:t>Pair representation</a:t>
             </a:r>
           </a:p>
           <a:p>
             <a:pPr algn="ctr"/>
             <a:r>
-              <a:rPr lang="en-US" altLang="zh-CN" sz="1400" dirty="0"/>
+              <a:rPr lang="en-US" altLang="zh-CN" sz="1400" dirty="0">
+                <a:latin typeface="Times New Roman" panose="02020603050405020304" pitchFamily="18" charset="0"/>
+                <a:cs typeface="Times New Roman" panose="02020603050405020304" pitchFamily="18" charset="0"/>
+              </a:rPr>
               <a:t>(Nr, Nr, H)</a:t>
             </a:r>
-            <a:endParaRPr lang="zh-CN" altLang="en-US" sz="1400" dirty="0"/>
+            <a:endParaRPr lang="zh-CN" altLang="en-US" sz="1400" dirty="0">
+              <a:latin typeface="Times New Roman" panose="02020603050405020304" pitchFamily="18" charset="0"/>
+              <a:cs typeface="Times New Roman" panose="02020603050405020304" pitchFamily="18" charset="0"/>
+            </a:endParaRPr>
           </a:p>
         </p:txBody>
       </p:sp>
@@ -13990,8 +14506,8 @@
         </p:nvSpPr>
         <p:spPr>
           <a:xfrm>
-            <a:off x="2499463" y="616515"/>
-            <a:ext cx="9533299" cy="5019078"/>
+            <a:off x="2499463" y="800100"/>
+            <a:ext cx="9533299" cy="4259580"/>
           </a:xfrm>
           <a:prstGeom prst="rect">
             <a:avLst/>
@@ -14022,7 +14538,10 @@
           <a:lstStyle/>
           <a:p>
             <a:pPr algn="ctr"/>
-            <a:endParaRPr lang="zh-CN" altLang="en-US"/>
+            <a:endParaRPr lang="zh-CN" altLang="en-US">
+              <a:latin typeface="Times New Roman" panose="02020603050405020304" pitchFamily="18" charset="0"/>
+              <a:cs typeface="Times New Roman" panose="02020603050405020304" pitchFamily="18" charset="0"/>
+            </a:endParaRPr>
           </a:p>
         </p:txBody>
       </p:sp>
@@ -14040,7 +14559,7 @@
         </p:nvSpPr>
         <p:spPr>
           <a:xfrm>
-            <a:off x="6586343" y="430368"/>
+            <a:off x="6586343" y="580270"/>
             <a:ext cx="1098625" cy="369332"/>
           </a:xfrm>
           <a:prstGeom prst="rect">
@@ -14057,10 +14576,16 @@
           <a:lstStyle/>
           <a:p>
             <a:r>
-              <a:rPr lang="en-US" altLang="zh-CN" dirty="0" err="1"/>
+              <a:rPr lang="en-US" altLang="zh-CN" dirty="0" err="1">
+                <a:latin typeface="Times New Roman" panose="02020603050405020304" pitchFamily="18" charset="0"/>
+                <a:cs typeface="Times New Roman" panose="02020603050405020304" pitchFamily="18" charset="0"/>
+              </a:rPr>
               <a:t>Evoformer</a:t>
             </a:r>
-            <a:endParaRPr lang="zh-CN" altLang="en-US" dirty="0"/>
+            <a:endParaRPr lang="zh-CN" altLang="en-US" dirty="0">
+              <a:latin typeface="Times New Roman" panose="02020603050405020304" pitchFamily="18" charset="0"/>
+              <a:cs typeface="Times New Roman" panose="02020603050405020304" pitchFamily="18" charset="0"/>
+            </a:endParaRPr>
           </a:p>
         </p:txBody>
       </p:sp>
@@ -14095,10 +14620,16 @@
           <a:lstStyle/>
           <a:p>
             <a:r>
-              <a:rPr lang="en-US" altLang="zh-CN" dirty="0"/>
+              <a:rPr lang="en-US" altLang="zh-CN" dirty="0">
+                <a:latin typeface="Times New Roman" panose="02020603050405020304" pitchFamily="18" charset="0"/>
+                <a:cs typeface="Times New Roman" panose="02020603050405020304" pitchFamily="18" charset="0"/>
+              </a:rPr>
               <a:t>4 iter</a:t>
             </a:r>
-            <a:endParaRPr lang="zh-CN" altLang="en-US" dirty="0"/>
+            <a:endParaRPr lang="zh-CN" altLang="en-US" dirty="0">
+              <a:latin typeface="Times New Roman" panose="02020603050405020304" pitchFamily="18" charset="0"/>
+              <a:cs typeface="Times New Roman" panose="02020603050405020304" pitchFamily="18" charset="0"/>
+            </a:endParaRPr>
           </a:p>
         </p:txBody>
       </p:sp>
@@ -14116,7 +14647,7 @@
         </p:nvGrpSpPr>
         <p:grpSpPr>
           <a:xfrm>
-            <a:off x="641144" y="2877629"/>
+            <a:off x="641144" y="2649163"/>
             <a:ext cx="1760834" cy="584775"/>
             <a:chOff x="641144" y="2844225"/>
             <a:chExt cx="1760834" cy="584775"/>
@@ -14173,6 +14704,8 @@
                 <a:solidFill>
                   <a:schemeClr val="tx1"/>
                 </a:solidFill>
+                <a:latin typeface="Times New Roman" panose="02020603050405020304" pitchFamily="18" charset="0"/>
+                <a:cs typeface="Times New Roman" panose="02020603050405020304" pitchFamily="18" charset="0"/>
               </a:endParaRPr>
             </a:p>
           </p:txBody>
@@ -14206,10 +14739,16 @@
             <a:lstStyle/>
             <a:p>
               <a:r>
-                <a:rPr lang="en-US" altLang="zh-CN" sz="1600" dirty="0"/>
+                <a:rPr lang="en-US" altLang="zh-CN" sz="1600" dirty="0">
+                  <a:latin typeface="Times New Roman" panose="02020603050405020304" pitchFamily="18" charset="0"/>
+                  <a:cs typeface="Times New Roman" panose="02020603050405020304" pitchFamily="18" charset="0"/>
+                </a:rPr>
                 <a:t>48×</a:t>
               </a:r>
-              <a:endParaRPr lang="zh-CN" altLang="en-US" sz="1600" dirty="0"/>
+              <a:endParaRPr lang="zh-CN" altLang="en-US" sz="1600" dirty="0">
+                <a:latin typeface="Times New Roman" panose="02020603050405020304" pitchFamily="18" charset="0"/>
+                <a:cs typeface="Times New Roman" panose="02020603050405020304" pitchFamily="18" charset="0"/>
+              </a:endParaRPr>
             </a:p>
           </p:txBody>
         </p:sp>
@@ -14243,18 +14782,30 @@
             <a:p>
               <a:pPr algn="ctr"/>
               <a:r>
-                <a:rPr lang="en-US" altLang="zh-CN" sz="1600" dirty="0" err="1"/>
+                <a:rPr lang="en-US" altLang="zh-CN" sz="1600" dirty="0" err="1">
+                  <a:latin typeface="Times New Roman" panose="02020603050405020304" pitchFamily="18" charset="0"/>
+                  <a:cs typeface="Times New Roman" panose="02020603050405020304" pitchFamily="18" charset="0"/>
+                </a:rPr>
                 <a:t>NoExtra</a:t>
               </a:r>
-              <a:endParaRPr lang="en-US" altLang="zh-CN" sz="1600" dirty="0"/>
+              <a:endParaRPr lang="en-US" altLang="zh-CN" sz="1600" dirty="0">
+                <a:latin typeface="Times New Roman" panose="02020603050405020304" pitchFamily="18" charset="0"/>
+                <a:cs typeface="Times New Roman" panose="02020603050405020304" pitchFamily="18" charset="0"/>
+              </a:endParaRPr>
             </a:p>
             <a:p>
               <a:pPr algn="ctr"/>
               <a:r>
-                <a:rPr lang="en-US" altLang="zh-CN" sz="1600" dirty="0" err="1"/>
+                <a:rPr lang="en-US" altLang="zh-CN" sz="1600" dirty="0" err="1">
+                  <a:latin typeface="Times New Roman" panose="02020603050405020304" pitchFamily="18" charset="0"/>
+                  <a:cs typeface="Times New Roman" panose="02020603050405020304" pitchFamily="18" charset="0"/>
+                </a:rPr>
                 <a:t>Evoformer</a:t>
               </a:r>
-              <a:endParaRPr lang="zh-CN" altLang="en-US" sz="1600" dirty="0"/>
+              <a:endParaRPr lang="zh-CN" altLang="en-US" sz="1600" dirty="0">
+                <a:latin typeface="Times New Roman" panose="02020603050405020304" pitchFamily="18" charset="0"/>
+                <a:cs typeface="Times New Roman" panose="02020603050405020304" pitchFamily="18" charset="0"/>
+              </a:endParaRPr>
             </a:p>
           </p:txBody>
         </p:sp>
@@ -14273,8 +14824,8 @@
         </p:nvSpPr>
         <p:spPr>
           <a:xfrm>
-            <a:off x="-1540046" y="357372"/>
-            <a:ext cx="6110514" cy="369332"/>
+            <a:off x="521034" y="359753"/>
+            <a:ext cx="1991129" cy="369332"/>
           </a:xfrm>
           <a:prstGeom prst="rect">
             <a:avLst/>
@@ -14293,6 +14844,8 @@
                 <a:solidFill>
                   <a:schemeClr val="tx1"/>
                 </a:solidFill>
+                <a:latin typeface="Times New Roman" panose="02020603050405020304" pitchFamily="18" charset="0"/>
+                <a:cs typeface="Times New Roman" panose="02020603050405020304" pitchFamily="18" charset="0"/>
               </a:rPr>
               <a:t>Protein Sequence</a:t>
             </a:r>
@@ -14300,6 +14853,8 @@
               <a:solidFill>
                 <a:schemeClr val="tx1"/>
               </a:solidFill>
+              <a:latin typeface="Times New Roman" panose="02020603050405020304" pitchFamily="18" charset="0"/>
+              <a:cs typeface="Times New Roman" panose="02020603050405020304" pitchFamily="18" charset="0"/>
             </a:endParaRPr>
           </a:p>
         </p:txBody>
@@ -14315,24 +14870,22 @@
           </p:cNvPr>
           <p:cNvCxnSpPr>
             <a:cxnSpLocks/>
-            <a:stCxn id="118" idx="2"/>
-            <a:endCxn id="4" idx="0"/>
           </p:cNvCxnSpPr>
           <p:nvPr/>
         </p:nvCxnSpPr>
         <p:spPr>
           <a:xfrm>
-            <a:off x="1515211" y="726704"/>
-            <a:ext cx="6350" cy="468875"/>
+            <a:off x="1514218" y="726704"/>
+            <a:ext cx="200" cy="277877"/>
           </a:xfrm>
           <a:prstGeom prst="straightConnector1">
             <a:avLst/>
           </a:prstGeom>
-          <a:ln>
+          <a:ln w="12700">
             <a:solidFill>
               <a:schemeClr val="tx1"/>
             </a:solidFill>
-            <a:tailEnd type="triangle"/>
+            <a:tailEnd type="none"/>
           </a:ln>
         </p:spPr>
         <p:style>
@@ -14364,7 +14917,7 @@
         </p:nvSpPr>
         <p:spPr>
           <a:xfrm>
-            <a:off x="641145" y="2053422"/>
+            <a:off x="641145" y="1826872"/>
             <a:ext cx="1760833" cy="544414"/>
           </a:xfrm>
           <a:prstGeom prst="roundRect">
@@ -14402,6 +14955,8 @@
                 <a:solidFill>
                   <a:schemeClr val="tx1"/>
                 </a:solidFill>
+                <a:latin typeface="Times New Roman" panose="02020603050405020304" pitchFamily="18" charset="0"/>
+                <a:cs typeface="Times New Roman" panose="02020603050405020304" pitchFamily="18" charset="0"/>
               </a:rPr>
               <a:t>4×ExtraEvoformer</a:t>
             </a:r>
@@ -14409,6 +14964,8 @@
               <a:solidFill>
                 <a:schemeClr val="tx1"/>
               </a:solidFill>
+              <a:latin typeface="Times New Roman" panose="02020603050405020304" pitchFamily="18" charset="0"/>
+              <a:cs typeface="Times New Roman" panose="02020603050405020304" pitchFamily="18" charset="0"/>
             </a:endParaRPr>
           </a:p>
         </p:txBody>

--- a/source/Alphafold.pptx
+++ b/source/Alphafold.pptx
@@ -259,7 +259,7 @@
           <a:p>
             <a:fld id="{250E99D2-494C-4EDB-8DE3-59EFC1FDB0F4}" type="datetimeFigureOut">
               <a:rPr lang="zh-CN" altLang="en-US" smtClean="0"/>
-              <a:t>2025/12/16</a:t>
+              <a:t>2025/12/17</a:t>
             </a:fld>
             <a:endParaRPr lang="zh-CN" altLang="en-US"/>
           </a:p>
@@ -457,7 +457,7 @@
           <a:p>
             <a:fld id="{250E99D2-494C-4EDB-8DE3-59EFC1FDB0F4}" type="datetimeFigureOut">
               <a:rPr lang="zh-CN" altLang="en-US" smtClean="0"/>
-              <a:t>2025/12/16</a:t>
+              <a:t>2025/12/17</a:t>
             </a:fld>
             <a:endParaRPr lang="zh-CN" altLang="en-US"/>
           </a:p>
@@ -665,7 +665,7 @@
           <a:p>
             <a:fld id="{250E99D2-494C-4EDB-8DE3-59EFC1FDB0F4}" type="datetimeFigureOut">
               <a:rPr lang="zh-CN" altLang="en-US" smtClean="0"/>
-              <a:t>2025/12/16</a:t>
+              <a:t>2025/12/17</a:t>
             </a:fld>
             <a:endParaRPr lang="zh-CN" altLang="en-US"/>
           </a:p>
@@ -863,7 +863,7 @@
           <a:p>
             <a:fld id="{250E99D2-494C-4EDB-8DE3-59EFC1FDB0F4}" type="datetimeFigureOut">
               <a:rPr lang="zh-CN" altLang="en-US" smtClean="0"/>
-              <a:t>2025/12/16</a:t>
+              <a:t>2025/12/17</a:t>
             </a:fld>
             <a:endParaRPr lang="zh-CN" altLang="en-US"/>
           </a:p>
@@ -1138,7 +1138,7 @@
           <a:p>
             <a:fld id="{250E99D2-494C-4EDB-8DE3-59EFC1FDB0F4}" type="datetimeFigureOut">
               <a:rPr lang="zh-CN" altLang="en-US" smtClean="0"/>
-              <a:t>2025/12/16</a:t>
+              <a:t>2025/12/17</a:t>
             </a:fld>
             <a:endParaRPr lang="zh-CN" altLang="en-US"/>
           </a:p>
@@ -1403,7 +1403,7 @@
           <a:p>
             <a:fld id="{250E99D2-494C-4EDB-8DE3-59EFC1FDB0F4}" type="datetimeFigureOut">
               <a:rPr lang="zh-CN" altLang="en-US" smtClean="0"/>
-              <a:t>2025/12/16</a:t>
+              <a:t>2025/12/17</a:t>
             </a:fld>
             <a:endParaRPr lang="zh-CN" altLang="en-US"/>
           </a:p>
@@ -1815,7 +1815,7 @@
           <a:p>
             <a:fld id="{250E99D2-494C-4EDB-8DE3-59EFC1FDB0F4}" type="datetimeFigureOut">
               <a:rPr lang="zh-CN" altLang="en-US" smtClean="0"/>
-              <a:t>2025/12/16</a:t>
+              <a:t>2025/12/17</a:t>
             </a:fld>
             <a:endParaRPr lang="zh-CN" altLang="en-US"/>
           </a:p>
@@ -1956,7 +1956,7 @@
           <a:p>
             <a:fld id="{250E99D2-494C-4EDB-8DE3-59EFC1FDB0F4}" type="datetimeFigureOut">
               <a:rPr lang="zh-CN" altLang="en-US" smtClean="0"/>
-              <a:t>2025/12/16</a:t>
+              <a:t>2025/12/17</a:t>
             </a:fld>
             <a:endParaRPr lang="zh-CN" altLang="en-US"/>
           </a:p>
@@ -2069,7 +2069,7 @@
           <a:p>
             <a:fld id="{250E99D2-494C-4EDB-8DE3-59EFC1FDB0F4}" type="datetimeFigureOut">
               <a:rPr lang="zh-CN" altLang="en-US" smtClean="0"/>
-              <a:t>2025/12/16</a:t>
+              <a:t>2025/12/17</a:t>
             </a:fld>
             <a:endParaRPr lang="zh-CN" altLang="en-US"/>
           </a:p>
@@ -2380,7 +2380,7 @@
           <a:p>
             <a:fld id="{250E99D2-494C-4EDB-8DE3-59EFC1FDB0F4}" type="datetimeFigureOut">
               <a:rPr lang="zh-CN" altLang="en-US" smtClean="0"/>
-              <a:t>2025/12/16</a:t>
+              <a:t>2025/12/17</a:t>
             </a:fld>
             <a:endParaRPr lang="zh-CN" altLang="en-US"/>
           </a:p>
@@ -2668,7 +2668,7 @@
           <a:p>
             <a:fld id="{250E99D2-494C-4EDB-8DE3-59EFC1FDB0F4}" type="datetimeFigureOut">
               <a:rPr lang="zh-CN" altLang="en-US" smtClean="0"/>
-              <a:t>2025/12/16</a:t>
+              <a:t>2025/12/17</a:t>
             </a:fld>
             <a:endParaRPr lang="zh-CN" altLang="en-US"/>
           </a:p>
@@ -2909,7 +2909,7 @@
           <a:p>
             <a:fld id="{250E99D2-494C-4EDB-8DE3-59EFC1FDB0F4}" type="datetimeFigureOut">
               <a:rPr lang="zh-CN" altLang="en-US" smtClean="0"/>
-              <a:t>2025/12/16</a:t>
+              <a:t>2025/12/17</a:t>
             </a:fld>
             <a:endParaRPr lang="zh-CN" altLang="en-US"/>
           </a:p>
@@ -3340,7 +3340,7 @@
         </p:nvGrpSpPr>
         <p:grpSpPr>
           <a:xfrm rot="16200000" flipV="1">
-            <a:off x="4965594" y="1426373"/>
+            <a:off x="4965594" y="1540673"/>
             <a:ext cx="1912407" cy="3955205"/>
             <a:chOff x="6730819" y="1098597"/>
             <a:chExt cx="2408844" cy="1595064"/>
@@ -3577,7 +3577,7 @@
         </p:nvGrpSpPr>
         <p:grpSpPr>
           <a:xfrm>
-            <a:off x="6730819" y="1008099"/>
+            <a:off x="6730819" y="1122399"/>
             <a:ext cx="2408844" cy="1802317"/>
             <a:chOff x="6730819" y="1098597"/>
             <a:chExt cx="2408844" cy="1595064"/>
@@ -4141,7 +4141,7 @@
         </p:blipFill>
         <p:spPr>
           <a:xfrm>
-            <a:off x="965775" y="4525090"/>
+            <a:off x="965775" y="4613990"/>
             <a:ext cx="1130621" cy="923821"/>
           </a:xfrm>
           <a:prstGeom prst="rect">
@@ -4168,7 +4168,7 @@
         <p:spPr>
           <a:xfrm>
             <a:off x="1521561" y="4056231"/>
-            <a:ext cx="9525" cy="468859"/>
+            <a:ext cx="9525" cy="557759"/>
           </a:xfrm>
           <a:prstGeom prst="straightConnector1">
             <a:avLst/>
@@ -4210,13 +4210,13 @@
           <p:nvPr>
             <p:extLst>
               <p:ext uri="{D42A27DB-BD31-4B8C-83A1-F6EECF244321}">
-                <p14:modId xmlns:p14="http://schemas.microsoft.com/office/powerpoint/2010/main" val="3095975163"/>
+                <p14:modId xmlns:p14="http://schemas.microsoft.com/office/powerpoint/2010/main" val="1113635502"/>
               </p:ext>
             </p:extLst>
           </p:nvPr>
         </p:nvGraphicFramePr>
         <p:xfrm>
-          <a:off x="2832445" y="949602"/>
+          <a:off x="2832445" y="1063902"/>
           <a:ext cx="1080000" cy="900000"/>
         </p:xfrm>
         <a:graphic>
@@ -6102,7 +6102,7 @@
         </p:nvSpPr>
         <p:spPr>
           <a:xfrm>
-            <a:off x="4862869" y="1039602"/>
+            <a:off x="4862869" y="1153902"/>
             <a:ext cx="753247" cy="720000"/>
           </a:xfrm>
           <a:prstGeom prst="roundRect">
@@ -6181,7 +6181,7 @@
         </p:nvSpPr>
         <p:spPr>
           <a:xfrm>
-            <a:off x="6741118" y="1039602"/>
+            <a:off x="6741118" y="1153902"/>
             <a:ext cx="757185" cy="720000"/>
           </a:xfrm>
           <a:prstGeom prst="roundRect">
@@ -6260,7 +6260,7 @@
         </p:nvSpPr>
         <p:spPr>
           <a:xfrm>
-            <a:off x="6241968" y="2176153"/>
+            <a:off x="6241968" y="2290453"/>
             <a:ext cx="1760832" cy="720000"/>
           </a:xfrm>
           <a:prstGeom prst="roundRect">
@@ -6339,7 +6339,7 @@
         </p:nvSpPr>
         <p:spPr>
           <a:xfrm>
-            <a:off x="8623307" y="1039602"/>
+            <a:off x="8623307" y="1153902"/>
             <a:ext cx="847544" cy="720000"/>
           </a:xfrm>
           <a:prstGeom prst="roundRect">
@@ -6422,13 +6422,13 @@
           <p:nvPr>
             <p:extLst>
               <p:ext uri="{D42A27DB-BD31-4B8C-83A1-F6EECF244321}">
-                <p14:modId xmlns:p14="http://schemas.microsoft.com/office/powerpoint/2010/main" val="243926330"/>
+                <p14:modId xmlns:p14="http://schemas.microsoft.com/office/powerpoint/2010/main" val="29685529"/>
               </p:ext>
             </p:extLst>
           </p:nvPr>
         </p:nvGraphicFramePr>
         <p:xfrm>
-          <a:off x="2832445" y="3177233"/>
+          <a:off x="2832445" y="3291533"/>
           <a:ext cx="1080000" cy="1080000"/>
         </p:xfrm>
         <a:graphic>
@@ -8681,7 +8681,7 @@
         </p:nvSpPr>
         <p:spPr>
           <a:xfrm>
-            <a:off x="5604420" y="3357233"/>
+            <a:off x="5604420" y="3471533"/>
             <a:ext cx="882032" cy="720000"/>
           </a:xfrm>
           <a:prstGeom prst="roundRect">
@@ -8763,7 +8763,7 @@
         </p:nvSpPr>
         <p:spPr>
           <a:xfrm>
-            <a:off x="6657076" y="3357233"/>
+            <a:off x="6657076" y="3471533"/>
             <a:ext cx="846000" cy="720000"/>
           </a:xfrm>
           <a:prstGeom prst="roundRect">
@@ -8842,7 +8842,7 @@
         </p:nvSpPr>
         <p:spPr>
           <a:xfrm>
-            <a:off x="8096436" y="3357233"/>
+            <a:off x="8096436" y="3471533"/>
             <a:ext cx="847543" cy="720000"/>
           </a:xfrm>
           <a:prstGeom prst="roundRect">
@@ -8921,7 +8921,7 @@
         </p:nvSpPr>
         <p:spPr>
           <a:xfrm>
-            <a:off x="4110914" y="3357233"/>
+            <a:off x="4110914" y="3471533"/>
             <a:ext cx="882000" cy="720000"/>
           </a:xfrm>
           <a:prstGeom prst="roundRect">
@@ -9004,13 +9004,13 @@
           <p:nvPr>
             <p:extLst>
               <p:ext uri="{D42A27DB-BD31-4B8C-83A1-F6EECF244321}">
-                <p14:modId xmlns:p14="http://schemas.microsoft.com/office/powerpoint/2010/main" val="1962810067"/>
+                <p14:modId xmlns:p14="http://schemas.microsoft.com/office/powerpoint/2010/main" val="486452023"/>
               </p:ext>
             </p:extLst>
           </p:nvPr>
         </p:nvGraphicFramePr>
         <p:xfrm>
-          <a:off x="10687164" y="949602"/>
+          <a:off x="10687164" y="1063902"/>
           <a:ext cx="1080000" cy="900000"/>
         </p:xfrm>
         <a:graphic>
@@ -10928,13 +10928,13 @@
           <p:nvPr>
             <p:extLst>
               <p:ext uri="{D42A27DB-BD31-4B8C-83A1-F6EECF244321}">
-                <p14:modId xmlns:p14="http://schemas.microsoft.com/office/powerpoint/2010/main" val="4151763453"/>
+                <p14:modId xmlns:p14="http://schemas.microsoft.com/office/powerpoint/2010/main" val="2249410043"/>
               </p:ext>
             </p:extLst>
           </p:nvPr>
         </p:nvGraphicFramePr>
         <p:xfrm>
-          <a:off x="10687164" y="3177233"/>
+          <a:off x="10687164" y="3291533"/>
           <a:ext cx="1080000" cy="1080000"/>
         </p:xfrm>
         <a:graphic>
@@ -13186,7 +13186,7 @@
         </p:nvSpPr>
         <p:spPr>
           <a:xfrm>
-            <a:off x="7949204" y="1039602"/>
+            <a:off x="7949204" y="1153902"/>
             <a:ext cx="223200" cy="720000"/>
           </a:xfrm>
           <a:prstGeom prst="roundRect">
@@ -13255,7 +13255,7 @@
         </p:nvSpPr>
         <p:spPr>
           <a:xfrm>
-            <a:off x="6067017" y="1039602"/>
+            <a:off x="6067017" y="1153902"/>
             <a:ext cx="223200" cy="720000"/>
           </a:xfrm>
           <a:prstGeom prst="roundRect">
@@ -13328,7 +13328,7 @@
         </p:nvCxnSpPr>
         <p:spPr>
           <a:xfrm>
-            <a:off x="3912445" y="1399602"/>
+            <a:off x="3912445" y="1513902"/>
             <a:ext cx="950424" cy="0"/>
           </a:xfrm>
           <a:prstGeom prst="straightConnector1">
@@ -13374,7 +13374,7 @@
         </p:nvCxnSpPr>
         <p:spPr>
           <a:xfrm>
-            <a:off x="5616116" y="1399602"/>
+            <a:off x="5616116" y="1513902"/>
             <a:ext cx="450901" cy="0"/>
           </a:xfrm>
           <a:prstGeom prst="straightConnector1">
@@ -13420,7 +13420,7 @@
         </p:nvCxnSpPr>
         <p:spPr>
           <a:xfrm>
-            <a:off x="6290217" y="1399602"/>
+            <a:off x="6290217" y="1513902"/>
             <a:ext cx="450901" cy="0"/>
           </a:xfrm>
           <a:prstGeom prst="straightConnector1">
@@ -13466,7 +13466,7 @@
         </p:nvCxnSpPr>
         <p:spPr>
           <a:xfrm>
-            <a:off x="7498303" y="1399602"/>
+            <a:off x="7498303" y="1513902"/>
             <a:ext cx="450901" cy="0"/>
           </a:xfrm>
           <a:prstGeom prst="straightConnector1">
@@ -13512,7 +13512,7 @@
         </p:nvCxnSpPr>
         <p:spPr>
           <a:xfrm>
-            <a:off x="8172404" y="1399602"/>
+            <a:off x="8172404" y="1513902"/>
             <a:ext cx="450903" cy="0"/>
           </a:xfrm>
           <a:prstGeom prst="straightConnector1">
@@ -13554,7 +13554,7 @@
         </p:nvSpPr>
         <p:spPr>
           <a:xfrm>
-            <a:off x="5190480" y="3357233"/>
+            <a:off x="5190480" y="3471533"/>
             <a:ext cx="220609" cy="720000"/>
           </a:xfrm>
           <a:prstGeom prst="roundRect">
@@ -13623,7 +13623,7 @@
         </p:nvSpPr>
         <p:spPr>
           <a:xfrm>
-            <a:off x="7684968" y="3357233"/>
+            <a:off x="7684968" y="3471533"/>
             <a:ext cx="224197" cy="720000"/>
           </a:xfrm>
           <a:prstGeom prst="roundRect">
@@ -13692,7 +13692,7 @@
         </p:nvSpPr>
         <p:spPr>
           <a:xfrm>
-            <a:off x="9139662" y="3357233"/>
+            <a:off x="9139662" y="3471533"/>
             <a:ext cx="224198" cy="720000"/>
           </a:xfrm>
           <a:prstGeom prst="roundRect">
@@ -13765,7 +13765,7 @@
         </p:nvCxnSpPr>
         <p:spPr>
           <a:xfrm>
-            <a:off x="4992914" y="3717233"/>
+            <a:off x="4992914" y="3831533"/>
             <a:ext cx="197566" cy="0"/>
           </a:xfrm>
           <a:prstGeom prst="straightConnector1">
@@ -13811,7 +13811,7 @@
         </p:nvCxnSpPr>
         <p:spPr>
           <a:xfrm>
-            <a:off x="5411089" y="3717233"/>
+            <a:off x="5411089" y="3831533"/>
             <a:ext cx="193331" cy="0"/>
           </a:xfrm>
           <a:prstGeom prst="straightConnector1">
@@ -13856,7 +13856,7 @@
         </p:nvCxnSpPr>
         <p:spPr>
           <a:xfrm>
-            <a:off x="6486452" y="3717233"/>
+            <a:off x="6486452" y="3831533"/>
             <a:ext cx="170624" cy="0"/>
           </a:xfrm>
           <a:prstGeom prst="straightConnector1">
@@ -13901,7 +13901,7 @@
         </p:nvCxnSpPr>
         <p:spPr>
           <a:xfrm>
-            <a:off x="7503076" y="3717233"/>
+            <a:off x="7503076" y="3831533"/>
             <a:ext cx="181892" cy="0"/>
           </a:xfrm>
           <a:prstGeom prst="straightConnector1">
@@ -13946,7 +13946,7 @@
         </p:nvCxnSpPr>
         <p:spPr>
           <a:xfrm>
-            <a:off x="7909165" y="3717233"/>
+            <a:off x="7909165" y="3831533"/>
             <a:ext cx="187271" cy="0"/>
           </a:xfrm>
           <a:prstGeom prst="straightConnector1">
@@ -13991,7 +13991,7 @@
         </p:nvCxnSpPr>
         <p:spPr>
           <a:xfrm>
-            <a:off x="8943979" y="3717233"/>
+            <a:off x="8943979" y="3831533"/>
             <a:ext cx="195683" cy="0"/>
           </a:xfrm>
           <a:prstGeom prst="straightConnector1">
@@ -14033,7 +14033,7 @@
         </p:nvSpPr>
         <p:spPr>
           <a:xfrm>
-            <a:off x="9574021" y="3357233"/>
+            <a:off x="9574021" y="3471533"/>
             <a:ext cx="847544" cy="720000"/>
           </a:xfrm>
           <a:prstGeom prst="roundRect">
@@ -14118,7 +14118,7 @@
         </p:nvCxnSpPr>
         <p:spPr>
           <a:xfrm>
-            <a:off x="9363860" y="3717233"/>
+            <a:off x="9363860" y="3831533"/>
             <a:ext cx="210161" cy="0"/>
           </a:xfrm>
           <a:prstGeom prst="straightConnector1">
@@ -14163,7 +14163,7 @@
         </p:nvCxnSpPr>
         <p:spPr>
           <a:xfrm>
-            <a:off x="10421565" y="3717233"/>
+            <a:off x="10421565" y="3831533"/>
             <a:ext cx="265599" cy="0"/>
           </a:xfrm>
           <a:prstGeom prst="straightConnector1">
@@ -14207,7 +14207,7 @@
         </p:nvCxnSpPr>
         <p:spPr>
           <a:xfrm flipV="1">
-            <a:off x="3713480" y="3717233"/>
+            <a:off x="3713480" y="3831533"/>
             <a:ext cx="397434" cy="2268"/>
           </a:xfrm>
           <a:prstGeom prst="straightConnector1">
@@ -14252,7 +14252,7 @@
         </p:nvCxnSpPr>
         <p:spPr>
           <a:xfrm>
-            <a:off x="9470851" y="1399602"/>
+            <a:off x="9470851" y="1513902"/>
             <a:ext cx="1216313" cy="0"/>
           </a:xfrm>
           <a:prstGeom prst="straightConnector1">
@@ -14294,7 +14294,7 @@
         </p:nvSpPr>
         <p:spPr>
           <a:xfrm>
-            <a:off x="2577148" y="2010254"/>
+            <a:off x="2577148" y="2124554"/>
             <a:ext cx="1590595" cy="523220"/>
           </a:xfrm>
           <a:prstGeom prst="rect">
@@ -14347,7 +14347,7 @@
         </p:nvSpPr>
         <p:spPr>
           <a:xfrm>
-            <a:off x="2577148" y="4453906"/>
+            <a:off x="2577148" y="4568206"/>
             <a:ext cx="1590595" cy="523220"/>
           </a:xfrm>
           <a:prstGeom prst="rect">
@@ -14400,7 +14400,7 @@
         </p:nvSpPr>
         <p:spPr>
           <a:xfrm>
-            <a:off x="10431867" y="2107849"/>
+            <a:off x="10431867" y="2222149"/>
             <a:ext cx="1590595" cy="523220"/>
           </a:xfrm>
           <a:prstGeom prst="rect">
@@ -14453,7 +14453,7 @@
         </p:nvSpPr>
         <p:spPr>
           <a:xfrm>
-            <a:off x="10431867" y="4438538"/>
+            <a:off x="10431867" y="4552838"/>
             <a:ext cx="1590595" cy="523220"/>
           </a:xfrm>
           <a:prstGeom prst="rect">
@@ -14506,7 +14506,7 @@
         </p:nvSpPr>
         <p:spPr>
           <a:xfrm>
-            <a:off x="2499463" y="800100"/>
+            <a:off x="2499463" y="914400"/>
             <a:ext cx="9533299" cy="4259580"/>
           </a:xfrm>
           <a:prstGeom prst="rect">
@@ -14559,7 +14559,7 @@
         </p:nvSpPr>
         <p:spPr>
           <a:xfrm>
-            <a:off x="6586343" y="580270"/>
+            <a:off x="6586343" y="694570"/>
             <a:ext cx="1098625" cy="369332"/>
           </a:xfrm>
           <a:prstGeom prst="rect">
